--- a/Final/Figures/exciton_figure.pptx
+++ b/Final/Figures/exciton_figure.pptx
@@ -10,6 +10,7 @@
     <p:sldId id="260" r:id="rId4"/>
     <p:sldId id="258" r:id="rId5"/>
     <p:sldId id="259" r:id="rId6"/>
+    <p:sldId id="261" r:id="rId7"/>
   </p:sldIdLst>
   <p:sldSz cx="9906000" cy="3240088"/>
   <p:notesSz cx="6858000" cy="9144000"/>
@@ -247,7 +248,7 @@
           <a:p>
             <a:fld id="{9FE2EF4A-16B9-4E22-B721-CD5BFA0656EB}" type="datetimeFigureOut">
               <a:rPr lang="zh-TW" altLang="en-US" smtClean="0"/>
-              <a:t>2026/5/20</a:t>
+              <a:t>2026/7/4</a:t>
             </a:fld>
             <a:endParaRPr lang="zh-TW" altLang="en-US"/>
           </a:p>
@@ -417,7 +418,7 @@
           <a:p>
             <a:fld id="{9FE2EF4A-16B9-4E22-B721-CD5BFA0656EB}" type="datetimeFigureOut">
               <a:rPr lang="zh-TW" altLang="en-US" smtClean="0"/>
-              <a:t>2026/5/20</a:t>
+              <a:t>2026/7/4</a:t>
             </a:fld>
             <a:endParaRPr lang="zh-TW" altLang="en-US"/>
           </a:p>
@@ -597,7 +598,7 @@
           <a:p>
             <a:fld id="{9FE2EF4A-16B9-4E22-B721-CD5BFA0656EB}" type="datetimeFigureOut">
               <a:rPr lang="zh-TW" altLang="en-US" smtClean="0"/>
-              <a:t>2026/5/20</a:t>
+              <a:t>2026/7/4</a:t>
             </a:fld>
             <a:endParaRPr lang="zh-TW" altLang="en-US"/>
           </a:p>
@@ -767,7 +768,7 @@
           <a:p>
             <a:fld id="{9FE2EF4A-16B9-4E22-B721-CD5BFA0656EB}" type="datetimeFigureOut">
               <a:rPr lang="zh-TW" altLang="en-US" smtClean="0"/>
-              <a:t>2026/5/20</a:t>
+              <a:t>2026/7/4</a:t>
             </a:fld>
             <a:endParaRPr lang="zh-TW" altLang="en-US"/>
           </a:p>
@@ -1013,7 +1014,7 @@
           <a:p>
             <a:fld id="{9FE2EF4A-16B9-4E22-B721-CD5BFA0656EB}" type="datetimeFigureOut">
               <a:rPr lang="zh-TW" altLang="en-US" smtClean="0"/>
-              <a:t>2026/5/20</a:t>
+              <a:t>2026/7/4</a:t>
             </a:fld>
             <a:endParaRPr lang="zh-TW" altLang="en-US"/>
           </a:p>
@@ -1245,7 +1246,7 @@
           <a:p>
             <a:fld id="{9FE2EF4A-16B9-4E22-B721-CD5BFA0656EB}" type="datetimeFigureOut">
               <a:rPr lang="zh-TW" altLang="en-US" smtClean="0"/>
-              <a:t>2026/5/20</a:t>
+              <a:t>2026/7/4</a:t>
             </a:fld>
             <a:endParaRPr lang="zh-TW" altLang="en-US"/>
           </a:p>
@@ -1612,7 +1613,7 @@
           <a:p>
             <a:fld id="{9FE2EF4A-16B9-4E22-B721-CD5BFA0656EB}" type="datetimeFigureOut">
               <a:rPr lang="zh-TW" altLang="en-US" smtClean="0"/>
-              <a:t>2026/5/20</a:t>
+              <a:t>2026/7/4</a:t>
             </a:fld>
             <a:endParaRPr lang="zh-TW" altLang="en-US"/>
           </a:p>
@@ -1730,7 +1731,7 @@
           <a:p>
             <a:fld id="{9FE2EF4A-16B9-4E22-B721-CD5BFA0656EB}" type="datetimeFigureOut">
               <a:rPr lang="zh-TW" altLang="en-US" smtClean="0"/>
-              <a:t>2026/5/20</a:t>
+              <a:t>2026/7/4</a:t>
             </a:fld>
             <a:endParaRPr lang="zh-TW" altLang="en-US"/>
           </a:p>
@@ -1825,7 +1826,7 @@
           <a:p>
             <a:fld id="{9FE2EF4A-16B9-4E22-B721-CD5BFA0656EB}" type="datetimeFigureOut">
               <a:rPr lang="zh-TW" altLang="en-US" smtClean="0"/>
-              <a:t>2026/5/20</a:t>
+              <a:t>2026/7/4</a:t>
             </a:fld>
             <a:endParaRPr lang="zh-TW" altLang="en-US"/>
           </a:p>
@@ -2102,7 +2103,7 @@
           <a:p>
             <a:fld id="{9FE2EF4A-16B9-4E22-B721-CD5BFA0656EB}" type="datetimeFigureOut">
               <a:rPr lang="zh-TW" altLang="en-US" smtClean="0"/>
-              <a:t>2026/5/20</a:t>
+              <a:t>2026/7/4</a:t>
             </a:fld>
             <a:endParaRPr lang="zh-TW" altLang="en-US"/>
           </a:p>
@@ -2359,7 +2360,7 @@
           <a:p>
             <a:fld id="{9FE2EF4A-16B9-4E22-B721-CD5BFA0656EB}" type="datetimeFigureOut">
               <a:rPr lang="zh-TW" altLang="en-US" smtClean="0"/>
-              <a:t>2026/5/20</a:t>
+              <a:t>2026/7/4</a:t>
             </a:fld>
             <a:endParaRPr lang="zh-TW" altLang="en-US"/>
           </a:p>
@@ -2572,7 +2573,7 @@
           <a:p>
             <a:fld id="{9FE2EF4A-16B9-4E22-B721-CD5BFA0656EB}" type="datetimeFigureOut">
               <a:rPr lang="zh-TW" altLang="en-US" smtClean="0"/>
-              <a:t>2026/5/20</a:t>
+              <a:t>2026/7/4</a:t>
             </a:fld>
             <a:endParaRPr lang="zh-TW" altLang="en-US"/>
           </a:p>
@@ -14863,8 +14864,8 @@
           </a:p>
         </p:txBody>
       </p:sp>
-      <mc:AlternateContent xmlns:mc="http://schemas.openxmlformats.org/markup-compatibility/2006">
-        <mc:Choice xmlns:a14="http://schemas.microsoft.com/office/drawing/2010/main" Requires="a14">
+      <mc:AlternateContent xmlns:mc="http://schemas.openxmlformats.org/markup-compatibility/2006" xmlns:a14="http://schemas.microsoft.com/office/drawing/2010/main">
+        <mc:Choice Requires="a14">
           <p:sp>
             <p:nvSpPr>
               <p:cNvPr id="622" name="文字方塊 621">
@@ -14918,7 +14919,7 @@
             </p:txBody>
           </p:sp>
         </mc:Choice>
-        <mc:Fallback>
+        <mc:Fallback xmlns="">
           <p:sp>
             <p:nvSpPr>
               <p:cNvPr id="622" name="文字方塊 621">
@@ -19065,6 +19066,3951 @@
 </p:sld>
 </file>
 
+<file path=ppt/slides/slide6.xml><?xml version="1.0" encoding="utf-8"?>
+<p:sld xmlns:a="http://schemas.openxmlformats.org/drawingml/2006/main" xmlns:r="http://schemas.openxmlformats.org/officeDocument/2006/relationships" xmlns:p="http://schemas.openxmlformats.org/presentationml/2006/main" show="0">
+  <p:cSld>
+    <p:spTree>
+      <p:nvGrpSpPr>
+        <p:cNvPr id="1" name=""/>
+        <p:cNvGrpSpPr/>
+        <p:nvPr/>
+      </p:nvGrpSpPr>
+      <p:grpSpPr>
+        <a:xfrm>
+          <a:off x="0" y="0"/>
+          <a:ext cx="0" cy="0"/>
+          <a:chOff x="0" y="0"/>
+          <a:chExt cx="0" cy="0"/>
+        </a:xfrm>
+      </p:grpSpPr>
+      <p:grpSp>
+        <p:nvGrpSpPr>
+          <p:cNvPr id="43" name="群組 42">
+            <a:extLst>
+              <a:ext uri="{FF2B5EF4-FFF2-40B4-BE49-F238E27FC236}">
+                <a16:creationId xmlns:a16="http://schemas.microsoft.com/office/drawing/2014/main" id="{ACF2C590-16D2-4F68-BFE0-F46970F497C8}"/>
+              </a:ext>
+            </a:extLst>
+          </p:cNvPr>
+          <p:cNvGrpSpPr/>
+          <p:nvPr/>
+        </p:nvGrpSpPr>
+        <p:grpSpPr>
+          <a:xfrm>
+            <a:off x="-110676" y="161777"/>
+            <a:ext cx="10031845" cy="3199116"/>
+            <a:chOff x="-110676" y="264170"/>
+            <a:chExt cx="10031845" cy="3199116"/>
+          </a:xfrm>
+        </p:grpSpPr>
+        <p:sp>
+          <p:nvSpPr>
+            <p:cNvPr id="7" name="直角三角形 6">
+              <a:extLst>
+                <a:ext uri="{FF2B5EF4-FFF2-40B4-BE49-F238E27FC236}">
+                  <a16:creationId xmlns:a16="http://schemas.microsoft.com/office/drawing/2014/main" id="{F14CFA0B-DBE0-476C-BC47-6C26024D58C7}"/>
+                </a:ext>
+              </a:extLst>
+            </p:cNvPr>
+            <p:cNvSpPr/>
+            <p:nvPr/>
+          </p:nvSpPr>
+          <p:spPr>
+            <a:xfrm rot="10800000" flipH="1">
+              <a:off x="4609726" y="2257428"/>
+              <a:ext cx="5311443" cy="778877"/>
+            </a:xfrm>
+            <a:prstGeom prst="rtTriangle">
+              <a:avLst/>
+            </a:prstGeom>
+            <a:solidFill>
+              <a:srgbClr val="FFC000">
+                <a:alpha val="30196"/>
+              </a:srgbClr>
+            </a:solidFill>
+            <a:ln>
+              <a:noFill/>
+            </a:ln>
+          </p:spPr>
+          <p:style>
+            <a:lnRef idx="2">
+              <a:schemeClr val="accent1">
+                <a:shade val="50000"/>
+              </a:schemeClr>
+            </a:lnRef>
+            <a:fillRef idx="1">
+              <a:schemeClr val="accent1"/>
+            </a:fillRef>
+            <a:effectRef idx="0">
+              <a:schemeClr val="accent1"/>
+            </a:effectRef>
+            <a:fontRef idx="minor">
+              <a:schemeClr val="lt1"/>
+            </a:fontRef>
+          </p:style>
+          <p:txBody>
+            <a:bodyPr rot="0" spcFirstLastPara="0" vertOverflow="overflow" horzOverflow="overflow" vert="horz" wrap="square" lIns="49664" tIns="24834" rIns="49664" bIns="24834" numCol="1" spcCol="0" rtlCol="0" fromWordArt="0" anchor="ctr" anchorCtr="0" forceAA="0" compatLnSpc="1">
+              <a:prstTxWarp prst="textNoShape">
+                <a:avLst/>
+              </a:prstTxWarp>
+              <a:noAutofit/>
+            </a:bodyPr>
+            <a:lstStyle/>
+            <a:p>
+              <a:pPr algn="ctr"/>
+              <a:endParaRPr lang="zh-TW" altLang="en-US" sz="2000">
+                <a:latin typeface="Times New Roman" panose="02020603050405020304" pitchFamily="18" charset="0"/>
+                <a:cs typeface="Times New Roman" panose="02020603050405020304" pitchFamily="18" charset="0"/>
+              </a:endParaRPr>
+            </a:p>
+          </p:txBody>
+        </p:sp>
+        <p:cxnSp>
+          <p:nvCxnSpPr>
+            <p:cNvPr id="8" name="直線單箭頭接點 7">
+              <a:extLst>
+                <a:ext uri="{FF2B5EF4-FFF2-40B4-BE49-F238E27FC236}">
+                  <a16:creationId xmlns:a16="http://schemas.microsoft.com/office/drawing/2014/main" id="{1F4F5E30-97D1-40FE-B5FD-60A17CDB3941}"/>
+                </a:ext>
+              </a:extLst>
+            </p:cNvPr>
+            <p:cNvCxnSpPr>
+              <a:cxnSpLocks/>
+            </p:cNvCxnSpPr>
+            <p:nvPr/>
+          </p:nvCxnSpPr>
+          <p:spPr>
+            <a:xfrm flipV="1">
+              <a:off x="1744363" y="1058111"/>
+              <a:ext cx="458601" cy="1109855"/>
+            </a:xfrm>
+            <a:prstGeom prst="straightConnector1">
+              <a:avLst/>
+            </a:prstGeom>
+            <a:ln w="57150">
+              <a:solidFill>
+                <a:schemeClr val="tx1"/>
+              </a:solidFill>
+              <a:prstDash val="sysDot"/>
+              <a:headEnd w="sm" len="sm"/>
+              <a:tailEnd type="triangle" w="med" len="lg"/>
+            </a:ln>
+          </p:spPr>
+          <p:style>
+            <a:lnRef idx="3">
+              <a:schemeClr val="accent4"/>
+            </a:lnRef>
+            <a:fillRef idx="0">
+              <a:schemeClr val="accent4"/>
+            </a:fillRef>
+            <a:effectRef idx="2">
+              <a:schemeClr val="accent4"/>
+            </a:effectRef>
+            <a:fontRef idx="minor">
+              <a:schemeClr val="tx1"/>
+            </a:fontRef>
+          </p:style>
+        </p:cxnSp>
+        <p:pic>
+          <p:nvPicPr>
+            <p:cNvPr id="10" name="圖片 9">
+              <a:extLst>
+                <a:ext uri="{FF2B5EF4-FFF2-40B4-BE49-F238E27FC236}">
+                  <a16:creationId xmlns:a16="http://schemas.microsoft.com/office/drawing/2014/main" id="{CA69316B-3ED7-4A25-A58C-D0B54010FC4A}"/>
+                </a:ext>
+              </a:extLst>
+            </p:cNvPr>
+            <p:cNvPicPr>
+              <a:picLocks noChangeAspect="1"/>
+            </p:cNvPicPr>
+            <p:nvPr/>
+          </p:nvPicPr>
+          <p:blipFill rotWithShape="1">
+            <a:blip r:embed="rId2"/>
+            <a:srcRect l="23881" t="20538" r="22392" b="22855"/>
+            <a:stretch/>
+          </p:blipFill>
+          <p:spPr>
+            <a:xfrm>
+              <a:off x="2405716" y="684126"/>
+              <a:ext cx="1574576" cy="1650002"/>
+            </a:xfrm>
+            <a:prstGeom prst="rect">
+              <a:avLst/>
+            </a:prstGeom>
+          </p:spPr>
+        </p:pic>
+        <mc:AlternateContent xmlns:mc="http://schemas.openxmlformats.org/markup-compatibility/2006" xmlns:a14="http://schemas.microsoft.com/office/drawing/2010/main">
+          <mc:Choice Requires="a14">
+            <p:sp>
+              <p:nvSpPr>
+                <p:cNvPr id="11" name="文字方塊 10">
+                  <a:extLst>
+                    <a:ext uri="{FF2B5EF4-FFF2-40B4-BE49-F238E27FC236}">
+                      <a16:creationId xmlns:a16="http://schemas.microsoft.com/office/drawing/2014/main" id="{CE76C9C2-AFB2-47A5-B8FA-E5603F0D8100}"/>
+                    </a:ext>
+                  </a:extLst>
+                </p:cNvPr>
+                <p:cNvSpPr txBox="1"/>
+                <p:nvPr/>
+              </p:nvSpPr>
+              <p:spPr>
+                <a:xfrm>
+                  <a:off x="3680469" y="1943403"/>
+                  <a:ext cx="433879" cy="400110"/>
+                </a:xfrm>
+                <a:prstGeom prst="rect">
+                  <a:avLst/>
+                </a:prstGeom>
+                <a:noFill/>
+              </p:spPr>
+              <p:txBody>
+                <a:bodyPr wrap="square" rtlCol="0">
+                  <a:spAutoFit/>
+                </a:bodyPr>
+                <a:lstStyle/>
+                <a:p>
+                  <a:pPr algn="ctr"/>
+                  <a14:m>
+                    <m:oMathPara xmlns:m="http://schemas.openxmlformats.org/officeDocument/2006/math">
+                      <m:oMathParaPr>
+                        <m:jc m:val="centerGroup"/>
+                      </m:oMathParaPr>
+                      <m:oMath xmlns:m="http://schemas.openxmlformats.org/officeDocument/2006/math">
+                        <m:r>
+                          <a:rPr lang="en-US" altLang="zh-TW" sz="2000" b="1" i="1">
+                            <a:latin typeface="Cambria Math" panose="02040503050406030204" pitchFamily="18" charset="0"/>
+                            <a:cs typeface="Times New Roman" panose="02020603050405020304" pitchFamily="18" charset="0"/>
+                          </a:rPr>
+                          <m:t>𝑸</m:t>
+                        </m:r>
+                      </m:oMath>
+                    </m:oMathPara>
+                  </a14:m>
+                  <a:endParaRPr lang="zh-TW" altLang="en-US" sz="2000" dirty="0">
+                    <a:latin typeface="Times New Roman" panose="02020603050405020304" pitchFamily="18" charset="0"/>
+                    <a:cs typeface="Times New Roman" panose="02020603050405020304" pitchFamily="18" charset="0"/>
+                  </a:endParaRPr>
+                </a:p>
+              </p:txBody>
+            </p:sp>
+          </mc:Choice>
+          <mc:Fallback xmlns="">
+            <p:sp>
+              <p:nvSpPr>
+                <p:cNvPr id="11" name="文字方塊 10">
+                  <a:extLst>
+                    <a:ext uri="{FF2B5EF4-FFF2-40B4-BE49-F238E27FC236}">
+                      <a16:creationId xmlns:a16="http://schemas.microsoft.com/office/drawing/2014/main" id="{CE76C9C2-AFB2-47A5-B8FA-E5603F0D8100}"/>
+                    </a:ext>
+                  </a:extLst>
+                </p:cNvPr>
+                <p:cNvSpPr txBox="1">
+                  <a:spLocks noRot="1" noChangeAspect="1" noMove="1" noResize="1" noEditPoints="1" noAdjustHandles="1" noChangeArrowheads="1" noChangeShapeType="1" noTextEdit="1"/>
+                </p:cNvSpPr>
+                <p:nvPr/>
+              </p:nvSpPr>
+              <p:spPr>
+                <a:xfrm>
+                  <a:off x="3680469" y="1943403"/>
+                  <a:ext cx="433879" cy="400110"/>
+                </a:xfrm>
+                <a:prstGeom prst="rect">
+                  <a:avLst/>
+                </a:prstGeom>
+                <a:blipFill>
+                  <a:blip r:embed="rId3"/>
+                  <a:stretch>
+                    <a:fillRect l="-5634" b="-12121"/>
+                  </a:stretch>
+                </a:blipFill>
+              </p:spPr>
+              <p:txBody>
+                <a:bodyPr/>
+                <a:lstStyle/>
+                <a:p>
+                  <a:r>
+                    <a:rPr lang="zh-TW" altLang="en-US">
+                      <a:noFill/>
+                    </a:rPr>
+                    <a:t> </a:t>
+                  </a:r>
+                </a:p>
+              </p:txBody>
+            </p:sp>
+          </mc:Fallback>
+        </mc:AlternateContent>
+        <p:cxnSp>
+          <p:nvCxnSpPr>
+            <p:cNvPr id="12" name="直線單箭頭接點 11">
+              <a:extLst>
+                <a:ext uri="{FF2B5EF4-FFF2-40B4-BE49-F238E27FC236}">
+                  <a16:creationId xmlns:a16="http://schemas.microsoft.com/office/drawing/2014/main" id="{A62E49AA-E01D-4D62-ABF2-3792BDC5C00B}"/>
+                </a:ext>
+              </a:extLst>
+            </p:cNvPr>
+            <p:cNvCxnSpPr>
+              <a:cxnSpLocks/>
+            </p:cNvCxnSpPr>
+            <p:nvPr/>
+          </p:nvCxnSpPr>
+          <p:spPr>
+            <a:xfrm>
+              <a:off x="3171117" y="1531481"/>
+              <a:ext cx="822214" cy="469584"/>
+            </a:xfrm>
+            <a:prstGeom prst="straightConnector1">
+              <a:avLst/>
+            </a:prstGeom>
+            <a:ln w="38100">
+              <a:solidFill>
+                <a:schemeClr val="tx1"/>
+              </a:solidFill>
+              <a:headEnd w="sm" len="sm"/>
+              <a:tailEnd type="triangle" w="med" len="lg"/>
+            </a:ln>
+          </p:spPr>
+          <p:style>
+            <a:lnRef idx="3">
+              <a:schemeClr val="accent4"/>
+            </a:lnRef>
+            <a:fillRef idx="0">
+              <a:schemeClr val="accent4"/>
+            </a:fillRef>
+            <a:effectRef idx="2">
+              <a:schemeClr val="accent4"/>
+            </a:effectRef>
+            <a:fontRef idx="minor">
+              <a:schemeClr val="tx1"/>
+            </a:fontRef>
+          </p:style>
+        </p:cxnSp>
+        <p:sp>
+          <p:nvSpPr>
+            <p:cNvPr id="13" name="橢圓 12">
+              <a:extLst>
+                <a:ext uri="{FF2B5EF4-FFF2-40B4-BE49-F238E27FC236}">
+                  <a16:creationId xmlns:a16="http://schemas.microsoft.com/office/drawing/2014/main" id="{58D763E4-BECE-44E4-ADFA-F1E5518CB990}"/>
+                </a:ext>
+              </a:extLst>
+            </p:cNvPr>
+            <p:cNvSpPr/>
+            <p:nvPr/>
+          </p:nvSpPr>
+          <p:spPr>
+            <a:xfrm rot="1664926">
+              <a:off x="2907145" y="971735"/>
+              <a:ext cx="495665" cy="1114385"/>
+            </a:xfrm>
+            <a:prstGeom prst="ellipse">
+              <a:avLst/>
+            </a:prstGeom>
+            <a:ln/>
+          </p:spPr>
+          <p:style>
+            <a:lnRef idx="0">
+              <a:schemeClr val="accent3"/>
+            </a:lnRef>
+            <a:fillRef idx="3">
+              <a:schemeClr val="accent3"/>
+            </a:fillRef>
+            <a:effectRef idx="3">
+              <a:schemeClr val="accent3"/>
+            </a:effectRef>
+            <a:fontRef idx="minor">
+              <a:schemeClr val="lt1"/>
+            </a:fontRef>
+          </p:style>
+          <p:txBody>
+            <a:bodyPr rot="0" spcFirstLastPara="0" vertOverflow="overflow" horzOverflow="overflow" vert="horz" wrap="square" lIns="71907" tIns="35956" rIns="71907" bIns="35956" numCol="1" spcCol="0" rtlCol="0" fromWordArt="0" anchor="ctr" anchorCtr="0" forceAA="0" compatLnSpc="1">
+              <a:prstTxWarp prst="textNoShape">
+                <a:avLst/>
+              </a:prstTxWarp>
+              <a:noAutofit/>
+            </a:bodyPr>
+            <a:lstStyle/>
+            <a:p>
+              <a:pPr algn="ctr"/>
+              <a:endParaRPr lang="zh-TW" altLang="en-US" sz="2000" dirty="0">
+                <a:latin typeface="Times New Roman" panose="02020603050405020304" pitchFamily="18" charset="0"/>
+                <a:cs typeface="Times New Roman" panose="02020603050405020304" pitchFamily="18" charset="0"/>
+              </a:endParaRPr>
+            </a:p>
+          </p:txBody>
+        </p:sp>
+        <p:grpSp>
+          <p:nvGrpSpPr>
+            <p:cNvPr id="14" name="群組 13">
+              <a:extLst>
+                <a:ext uri="{FF2B5EF4-FFF2-40B4-BE49-F238E27FC236}">
+                  <a16:creationId xmlns:a16="http://schemas.microsoft.com/office/drawing/2014/main" id="{26019901-F8F7-474A-8470-82A9974C6862}"/>
+                </a:ext>
+              </a:extLst>
+            </p:cNvPr>
+            <p:cNvGrpSpPr/>
+            <p:nvPr/>
+          </p:nvGrpSpPr>
+          <p:grpSpPr>
+            <a:xfrm>
+              <a:off x="2825743" y="1694033"/>
+              <a:ext cx="383195" cy="353943"/>
+              <a:chOff x="-4223299" y="8635134"/>
+              <a:chExt cx="733221" cy="677253"/>
+            </a:xfrm>
+          </p:grpSpPr>
+          <p:sp>
+            <p:nvSpPr>
+              <p:cNvPr id="18" name="橢圓 17">
+                <a:extLst>
+                  <a:ext uri="{FF2B5EF4-FFF2-40B4-BE49-F238E27FC236}">
+                    <a16:creationId xmlns:a16="http://schemas.microsoft.com/office/drawing/2014/main" id="{794F39D2-A2A5-43E9-9401-4C4D2C4A941D}"/>
+                  </a:ext>
+                </a:extLst>
+              </p:cNvPr>
+              <p:cNvSpPr/>
+              <p:nvPr/>
+            </p:nvSpPr>
+            <p:spPr>
+              <a:xfrm>
+                <a:off x="-4215777" y="8667100"/>
+                <a:ext cx="551071" cy="551075"/>
+              </a:xfrm>
+              <a:prstGeom prst="ellipse">
+                <a:avLst/>
+              </a:prstGeom>
+              <a:solidFill>
+                <a:schemeClr val="bg1"/>
+              </a:solidFill>
+              <a:ln>
+                <a:solidFill>
+                  <a:schemeClr val="tx1"/>
+                </a:solidFill>
+              </a:ln>
+            </p:spPr>
+            <p:style>
+              <a:lnRef idx="2">
+                <a:schemeClr val="accent1">
+                  <a:shade val="50000"/>
+                </a:schemeClr>
+              </a:lnRef>
+              <a:fillRef idx="1">
+                <a:schemeClr val="accent1"/>
+              </a:fillRef>
+              <a:effectRef idx="0">
+                <a:schemeClr val="accent1"/>
+              </a:effectRef>
+              <a:fontRef idx="minor">
+                <a:schemeClr val="lt1"/>
+              </a:fontRef>
+            </p:style>
+            <p:txBody>
+              <a:bodyPr rtlCol="0" anchor="ctr"/>
+              <a:lstStyle/>
+              <a:p>
+                <a:pPr algn="ctr"/>
+                <a:r>
+                  <a:rPr lang="en-US" altLang="zh-TW" sz="1700" dirty="0">
+                    <a:latin typeface="Times New Roman" panose="02020603050405020304" pitchFamily="18" charset="0"/>
+                    <a:cs typeface="Times New Roman" panose="02020603050405020304" pitchFamily="18" charset="0"/>
+                  </a:rPr>
+                  <a:t>0</a:t>
+                </a:r>
+                <a:endParaRPr lang="zh-TW" altLang="en-US" sz="1700" dirty="0">
+                  <a:latin typeface="Times New Roman" panose="02020603050405020304" pitchFamily="18" charset="0"/>
+                  <a:cs typeface="Times New Roman" panose="02020603050405020304" pitchFamily="18" charset="0"/>
+                </a:endParaRPr>
+              </a:p>
+            </p:txBody>
+          </p:sp>
+          <mc:AlternateContent xmlns:mc="http://schemas.openxmlformats.org/markup-compatibility/2006" xmlns:a14="http://schemas.microsoft.com/office/drawing/2010/main">
+            <mc:Choice Requires="a14">
+              <p:sp>
+                <p:nvSpPr>
+                  <p:cNvPr id="19" name="文字方塊 18">
+                    <a:extLst>
+                      <a:ext uri="{FF2B5EF4-FFF2-40B4-BE49-F238E27FC236}">
+                        <a16:creationId xmlns:a16="http://schemas.microsoft.com/office/drawing/2014/main" id="{4B491E3F-8726-4CE4-A38B-0FA5CDB96057}"/>
+                      </a:ext>
+                    </a:extLst>
+                  </p:cNvPr>
+                  <p:cNvSpPr txBox="1"/>
+                  <p:nvPr/>
+                </p:nvSpPr>
+                <p:spPr>
+                  <a:xfrm>
+                    <a:off x="-4223299" y="8635134"/>
+                    <a:ext cx="733221" cy="677253"/>
+                  </a:xfrm>
+                  <a:prstGeom prst="rect">
+                    <a:avLst/>
+                  </a:prstGeom>
+                  <a:noFill/>
+                </p:spPr>
+                <p:txBody>
+                  <a:bodyPr wrap="square" rtlCol="0">
+                    <a:spAutoFit/>
+                  </a:bodyPr>
+                  <a:lstStyle/>
+                  <a:p>
+                    <a:pPr algn="ctr"/>
+                    <a14:m>
+                      <m:oMathPara xmlns:m="http://schemas.openxmlformats.org/officeDocument/2006/math">
+                        <m:oMathParaPr>
+                          <m:jc m:val="centerGroup"/>
+                        </m:oMathParaPr>
+                        <m:oMath xmlns:m="http://schemas.openxmlformats.org/officeDocument/2006/math">
+                          <m:sSup>
+                            <m:sSupPr>
+                              <m:ctrlPr>
+                                <a:rPr lang="en-US" altLang="zh-TW" sz="1700" b="1" i="1" dirty="0">
+                                  <a:latin typeface="Cambria Math" panose="02040503050406030204" pitchFamily="18" charset="0"/>
+                                  <a:cs typeface="Times New Roman" panose="02020603050405020304" pitchFamily="18" charset="0"/>
+                                </a:rPr>
+                              </m:ctrlPr>
+                            </m:sSupPr>
+                            <m:e>
+                              <m:r>
+                                <a:rPr lang="en-US" altLang="zh-TW" sz="1700" b="1" i="1" dirty="0">
+                                  <a:latin typeface="Cambria Math" panose="02040503050406030204" pitchFamily="18" charset="0"/>
+                                  <a:cs typeface="Times New Roman" panose="02020603050405020304" pitchFamily="18" charset="0"/>
+                                </a:rPr>
+                                <m:t>𝒉</m:t>
+                              </m:r>
+                            </m:e>
+                            <m:sup>
+                              <m:r>
+                                <a:rPr lang="en-US" altLang="zh-TW" sz="1700" b="1" i="1" dirty="0">
+                                  <a:latin typeface="Cambria Math" panose="02040503050406030204" pitchFamily="18" charset="0"/>
+                                  <a:cs typeface="Times New Roman" panose="02020603050405020304" pitchFamily="18" charset="0"/>
+                                </a:rPr>
+                                <m:t>+</m:t>
+                              </m:r>
+                            </m:sup>
+                          </m:sSup>
+                        </m:oMath>
+                      </m:oMathPara>
+                    </a14:m>
+                    <a:endParaRPr lang="zh-TW" altLang="en-US" sz="1700" b="1" dirty="0">
+                      <a:latin typeface="Times New Roman" panose="02020603050405020304" pitchFamily="18" charset="0"/>
+                      <a:cs typeface="Times New Roman" panose="02020603050405020304" pitchFamily="18" charset="0"/>
+                    </a:endParaRPr>
+                  </a:p>
+                </p:txBody>
+              </p:sp>
+            </mc:Choice>
+            <mc:Fallback xmlns="">
+              <p:sp>
+                <p:nvSpPr>
+                  <p:cNvPr id="19" name="文字方塊 18">
+                    <a:extLst>
+                      <a:ext uri="{FF2B5EF4-FFF2-40B4-BE49-F238E27FC236}">
+                        <a16:creationId xmlns:a16="http://schemas.microsoft.com/office/drawing/2014/main" id="{4B491E3F-8726-4CE4-A38B-0FA5CDB96057}"/>
+                      </a:ext>
+                    </a:extLst>
+                  </p:cNvPr>
+                  <p:cNvSpPr txBox="1">
+                    <a:spLocks noRot="1" noChangeAspect="1" noMove="1" noResize="1" noEditPoints="1" noAdjustHandles="1" noChangeArrowheads="1" noChangeShapeType="1" noTextEdit="1"/>
+                  </p:cNvSpPr>
+                  <p:nvPr/>
+                </p:nvSpPr>
+                <p:spPr>
+                  <a:xfrm>
+                    <a:off x="-4223299" y="8635134"/>
+                    <a:ext cx="733221" cy="677253"/>
+                  </a:xfrm>
+                  <a:prstGeom prst="rect">
+                    <a:avLst/>
+                  </a:prstGeom>
+                  <a:blipFill>
+                    <a:blip r:embed="rId4"/>
+                    <a:stretch>
+                      <a:fillRect l="-12903"/>
+                    </a:stretch>
+                  </a:blipFill>
+                </p:spPr>
+                <p:txBody>
+                  <a:bodyPr/>
+                  <a:lstStyle/>
+                  <a:p>
+                    <a:r>
+                      <a:rPr lang="zh-TW" altLang="en-US">
+                        <a:noFill/>
+                      </a:rPr>
+                      <a:t> </a:t>
+                    </a:r>
+                  </a:p>
+                </p:txBody>
+              </p:sp>
+            </mc:Fallback>
+          </mc:AlternateContent>
+        </p:grpSp>
+        <p:grpSp>
+          <p:nvGrpSpPr>
+            <p:cNvPr id="15" name="群組 14">
+              <a:extLst>
+                <a:ext uri="{FF2B5EF4-FFF2-40B4-BE49-F238E27FC236}">
+                  <a16:creationId xmlns:a16="http://schemas.microsoft.com/office/drawing/2014/main" id="{4F2FB5EC-5268-46BB-BD75-909AC0E075A9}"/>
+                </a:ext>
+              </a:extLst>
+            </p:cNvPr>
+            <p:cNvGrpSpPr/>
+            <p:nvPr/>
+          </p:nvGrpSpPr>
+          <p:grpSpPr>
+            <a:xfrm>
+              <a:off x="3174515" y="1015044"/>
+              <a:ext cx="337772" cy="353943"/>
+              <a:chOff x="-3327105" y="7332627"/>
+              <a:chExt cx="646307" cy="677255"/>
+            </a:xfrm>
+          </p:grpSpPr>
+          <p:sp>
+            <p:nvSpPr>
+              <p:cNvPr id="16" name="橢圓 15">
+                <a:extLst>
+                  <a:ext uri="{FF2B5EF4-FFF2-40B4-BE49-F238E27FC236}">
+                    <a16:creationId xmlns:a16="http://schemas.microsoft.com/office/drawing/2014/main" id="{85377E42-3E21-48FB-945C-E7757EF30678}"/>
+                  </a:ext>
+                </a:extLst>
+              </p:cNvPr>
+              <p:cNvSpPr/>
+              <p:nvPr/>
+            </p:nvSpPr>
+            <p:spPr>
+              <a:xfrm>
+                <a:off x="-3327105" y="7427048"/>
+                <a:ext cx="551071" cy="551075"/>
+              </a:xfrm>
+              <a:prstGeom prst="ellipse">
+                <a:avLst/>
+              </a:prstGeom>
+              <a:solidFill>
+                <a:schemeClr val="tx1"/>
+              </a:solidFill>
+              <a:ln>
+                <a:solidFill>
+                  <a:schemeClr val="tx1"/>
+                </a:solidFill>
+              </a:ln>
+            </p:spPr>
+            <p:style>
+              <a:lnRef idx="2">
+                <a:schemeClr val="accent1">
+                  <a:shade val="50000"/>
+                </a:schemeClr>
+              </a:lnRef>
+              <a:fillRef idx="1">
+                <a:schemeClr val="accent1"/>
+              </a:fillRef>
+              <a:effectRef idx="0">
+                <a:schemeClr val="accent1"/>
+              </a:effectRef>
+              <a:fontRef idx="minor">
+                <a:schemeClr val="lt1"/>
+              </a:fontRef>
+            </p:style>
+            <p:txBody>
+              <a:bodyPr rtlCol="0" anchor="ctr"/>
+              <a:lstStyle/>
+              <a:p>
+                <a:pPr algn="ctr"/>
+                <a:endParaRPr lang="zh-TW" altLang="en-US" sz="1700" dirty="0">
+                  <a:latin typeface="Times New Roman" panose="02020603050405020304" pitchFamily="18" charset="0"/>
+                  <a:cs typeface="Times New Roman" panose="02020603050405020304" pitchFamily="18" charset="0"/>
+                </a:endParaRPr>
+              </a:p>
+            </p:txBody>
+          </p:sp>
+          <mc:AlternateContent xmlns:mc="http://schemas.openxmlformats.org/markup-compatibility/2006" xmlns:a14="http://schemas.microsoft.com/office/drawing/2010/main">
+            <mc:Choice Requires="a14">
+              <p:sp>
+                <p:nvSpPr>
+                  <p:cNvPr id="17" name="文字方塊 16">
+                    <a:extLst>
+                      <a:ext uri="{FF2B5EF4-FFF2-40B4-BE49-F238E27FC236}">
+                        <a16:creationId xmlns:a16="http://schemas.microsoft.com/office/drawing/2014/main" id="{B1831A24-EEE7-4BDF-BA73-6505F7C1FD34}"/>
+                      </a:ext>
+                    </a:extLst>
+                  </p:cNvPr>
+                  <p:cNvSpPr txBox="1"/>
+                  <p:nvPr/>
+                </p:nvSpPr>
+                <p:spPr>
+                  <a:xfrm>
+                    <a:off x="-3276010" y="7332627"/>
+                    <a:ext cx="595212" cy="677255"/>
+                  </a:xfrm>
+                  <a:prstGeom prst="rect">
+                    <a:avLst/>
+                  </a:prstGeom>
+                  <a:noFill/>
+                </p:spPr>
+                <p:txBody>
+                  <a:bodyPr wrap="square" rtlCol="0">
+                    <a:spAutoFit/>
+                  </a:bodyPr>
+                  <a:lstStyle/>
+                  <a:p>
+                    <a:pPr algn="ctr"/>
+                    <a14:m>
+                      <m:oMathPara xmlns:m="http://schemas.openxmlformats.org/officeDocument/2006/math">
+                        <m:oMathParaPr>
+                          <m:jc m:val="centerGroup"/>
+                        </m:oMathParaPr>
+                        <m:oMath xmlns:m="http://schemas.openxmlformats.org/officeDocument/2006/math">
+                          <m:sSup>
+                            <m:sSupPr>
+                              <m:ctrlPr>
+                                <a:rPr lang="en-US" altLang="zh-TW" sz="1700" b="1" i="1" dirty="0">
+                                  <a:solidFill>
+                                    <a:schemeClr val="bg1"/>
+                                  </a:solidFill>
+                                  <a:latin typeface="Cambria Math" panose="02040503050406030204" pitchFamily="18" charset="0"/>
+                                  <a:cs typeface="Times New Roman" panose="02020603050405020304" pitchFamily="18" charset="0"/>
+                                </a:rPr>
+                              </m:ctrlPr>
+                            </m:sSupPr>
+                            <m:e>
+                              <m:r>
+                                <a:rPr lang="en-US" altLang="zh-TW" sz="1700" b="1" i="1" dirty="0">
+                                  <a:solidFill>
+                                    <a:schemeClr val="bg1"/>
+                                  </a:solidFill>
+                                  <a:latin typeface="Cambria Math" panose="02040503050406030204" pitchFamily="18" charset="0"/>
+                                  <a:cs typeface="Times New Roman" panose="02020603050405020304" pitchFamily="18" charset="0"/>
+                                </a:rPr>
+                                <m:t>𝒆</m:t>
+                              </m:r>
+                            </m:e>
+                            <m:sup>
+                              <m:r>
+                                <a:rPr lang="en-US" altLang="zh-TW" sz="1700" b="1" i="1" dirty="0">
+                                  <a:solidFill>
+                                    <a:schemeClr val="bg1"/>
+                                  </a:solidFill>
+                                  <a:latin typeface="Cambria Math" panose="02040503050406030204" pitchFamily="18" charset="0"/>
+                                  <a:cs typeface="Times New Roman" panose="02020603050405020304" pitchFamily="18" charset="0"/>
+                                </a:rPr>
+                                <m:t>−</m:t>
+                              </m:r>
+                            </m:sup>
+                          </m:sSup>
+                        </m:oMath>
+                      </m:oMathPara>
+                    </a14:m>
+                    <a:endParaRPr lang="zh-TW" altLang="en-US" sz="1700" b="1" dirty="0">
+                      <a:solidFill>
+                        <a:schemeClr val="bg1"/>
+                      </a:solidFill>
+                      <a:latin typeface="Times New Roman" panose="02020603050405020304" pitchFamily="18" charset="0"/>
+                      <a:cs typeface="Times New Roman" panose="02020603050405020304" pitchFamily="18" charset="0"/>
+                    </a:endParaRPr>
+                  </a:p>
+                </p:txBody>
+              </p:sp>
+            </mc:Choice>
+            <mc:Fallback xmlns="">
+              <p:sp>
+                <p:nvSpPr>
+                  <p:cNvPr id="17" name="文字方塊 16">
+                    <a:extLst>
+                      <a:ext uri="{FF2B5EF4-FFF2-40B4-BE49-F238E27FC236}">
+                        <a16:creationId xmlns:a16="http://schemas.microsoft.com/office/drawing/2014/main" id="{B1831A24-EEE7-4BDF-BA73-6505F7C1FD34}"/>
+                      </a:ext>
+                    </a:extLst>
+                  </p:cNvPr>
+                  <p:cNvSpPr txBox="1">
+                    <a:spLocks noRot="1" noChangeAspect="1" noMove="1" noResize="1" noEditPoints="1" noAdjustHandles="1" noChangeArrowheads="1" noChangeShapeType="1" noTextEdit="1"/>
+                  </p:cNvSpPr>
+                  <p:nvPr/>
+                </p:nvSpPr>
+                <p:spPr>
+                  <a:xfrm>
+                    <a:off x="-3276010" y="7332627"/>
+                    <a:ext cx="595212" cy="677255"/>
+                  </a:xfrm>
+                  <a:prstGeom prst="rect">
+                    <a:avLst/>
+                  </a:prstGeom>
+                  <a:blipFill>
+                    <a:blip r:embed="rId5"/>
+                    <a:stretch>
+                      <a:fillRect l="-15686"/>
+                    </a:stretch>
+                  </a:blipFill>
+                </p:spPr>
+                <p:txBody>
+                  <a:bodyPr/>
+                  <a:lstStyle/>
+                  <a:p>
+                    <a:r>
+                      <a:rPr lang="zh-TW" altLang="en-US">
+                        <a:noFill/>
+                      </a:rPr>
+                      <a:t> </a:t>
+                    </a:r>
+                  </a:p>
+                </p:txBody>
+              </p:sp>
+            </mc:Fallback>
+          </mc:AlternateContent>
+        </p:grpSp>
+        <p:pic>
+          <p:nvPicPr>
+            <p:cNvPr id="20" name="圖片 19">
+              <a:extLst>
+                <a:ext uri="{FF2B5EF4-FFF2-40B4-BE49-F238E27FC236}">
+                  <a16:creationId xmlns:a16="http://schemas.microsoft.com/office/drawing/2014/main" id="{56C6FB4A-0956-45FE-AE46-FB981DDEE920}"/>
+                </a:ext>
+              </a:extLst>
+            </p:cNvPr>
+            <p:cNvPicPr>
+              <a:picLocks noChangeAspect="1"/>
+            </p:cNvPicPr>
+            <p:nvPr/>
+          </p:nvPicPr>
+          <p:blipFill rotWithShape="1">
+            <a:blip r:embed="rId6"/>
+            <a:srcRect l="7663" t="40135" r="7542" b="-2"/>
+            <a:stretch/>
+          </p:blipFill>
+          <p:spPr>
+            <a:xfrm>
+              <a:off x="895936" y="470667"/>
+              <a:ext cx="2096288" cy="602117"/>
+            </a:xfrm>
+            <a:prstGeom prst="rect">
+              <a:avLst/>
+            </a:prstGeom>
+          </p:spPr>
+        </p:pic>
+        <p:grpSp>
+          <p:nvGrpSpPr>
+            <p:cNvPr id="21" name="群組 20">
+              <a:extLst>
+                <a:ext uri="{FF2B5EF4-FFF2-40B4-BE49-F238E27FC236}">
+                  <a16:creationId xmlns:a16="http://schemas.microsoft.com/office/drawing/2014/main" id="{FBF70BF0-C488-4983-A6E5-87FD6FA5E3B1}"/>
+                </a:ext>
+              </a:extLst>
+            </p:cNvPr>
+            <p:cNvGrpSpPr/>
+            <p:nvPr/>
+          </p:nvGrpSpPr>
+          <p:grpSpPr>
+            <a:xfrm>
+              <a:off x="6537153" y="1544778"/>
+              <a:ext cx="2782952" cy="305427"/>
+              <a:chOff x="3345002" y="11560841"/>
+              <a:chExt cx="5123831" cy="562337"/>
+            </a:xfrm>
+          </p:grpSpPr>
+          <p:pic>
+            <p:nvPicPr>
+              <p:cNvPr id="22" name="Picture 2" descr="https://www.mdpi.com/applsci/applsci-08-01157/article_deploy/html/images/applsci-08-01157-g001.png">
+                <a:extLst>
+                  <a:ext uri="{FF2B5EF4-FFF2-40B4-BE49-F238E27FC236}">
+                    <a16:creationId xmlns:a16="http://schemas.microsoft.com/office/drawing/2014/main" id="{F70317E0-89D6-418B-B738-6BE787CDC508}"/>
+                  </a:ext>
+                </a:extLst>
+              </p:cNvPr>
+              <p:cNvPicPr>
+                <a:picLocks noChangeAspect="1" noChangeArrowheads="1"/>
+              </p:cNvPicPr>
+              <p:nvPr/>
+            </p:nvPicPr>
+            <p:blipFill rotWithShape="1">
+              <a:blip r:embed="rId7">
+                <a:extLst>
+                  <a:ext uri="{28A0092B-C50C-407E-A947-70E740481C1C}">
+                    <a14:useLocalDpi xmlns:a14="http://schemas.microsoft.com/office/drawing/2010/main" val="0"/>
+                  </a:ext>
+                </a:extLst>
+              </a:blip>
+              <a:srcRect l="5134" t="44380" r="72508" b="47528"/>
+              <a:stretch/>
+            </p:blipFill>
+            <p:spPr bwMode="auto">
+              <a:xfrm>
+                <a:off x="3345002" y="11560841"/>
+                <a:ext cx="2771314" cy="562337"/>
+              </a:xfrm>
+              <a:prstGeom prst="rect">
+                <a:avLst/>
+              </a:prstGeom>
+              <a:noFill/>
+              <a:extLst>
+                <a:ext uri="{909E8E84-426E-40DD-AFC4-6F175D3DCCD1}">
+                  <a14:hiddenFill xmlns:a14="http://schemas.microsoft.com/office/drawing/2010/main">
+                    <a:solidFill>
+                      <a:srgbClr val="FFFFFF"/>
+                    </a:solidFill>
+                  </a14:hiddenFill>
+                </a:ext>
+              </a:extLst>
+            </p:spPr>
+          </p:pic>
+          <p:pic>
+            <p:nvPicPr>
+              <p:cNvPr id="23" name="Picture 2" descr="https://www.mdpi.com/applsci/applsci-08-01157/article_deploy/html/images/applsci-08-01157-g001.png">
+                <a:extLst>
+                  <a:ext uri="{FF2B5EF4-FFF2-40B4-BE49-F238E27FC236}">
+                    <a16:creationId xmlns:a16="http://schemas.microsoft.com/office/drawing/2014/main" id="{05DAF9F0-3FC0-4CDF-9715-8BE8241280D5}"/>
+                  </a:ext>
+                </a:extLst>
+              </p:cNvPr>
+              <p:cNvPicPr>
+                <a:picLocks noChangeAspect="1" noChangeArrowheads="1"/>
+              </p:cNvPicPr>
+              <p:nvPr/>
+            </p:nvPicPr>
+            <p:blipFill rotWithShape="1">
+              <a:blip r:embed="rId7">
+                <a:extLst>
+                  <a:ext uri="{28A0092B-C50C-407E-A947-70E740481C1C}">
+                    <a14:useLocalDpi xmlns:a14="http://schemas.microsoft.com/office/drawing/2010/main" val="0"/>
+                  </a:ext>
+                </a:extLst>
+              </a:blip>
+              <a:srcRect l="8003" t="44380" r="72781" b="47528"/>
+              <a:stretch/>
+            </p:blipFill>
+            <p:spPr bwMode="auto">
+              <a:xfrm>
+                <a:off x="6087038" y="11560841"/>
+                <a:ext cx="2381795" cy="562337"/>
+              </a:xfrm>
+              <a:prstGeom prst="rect">
+                <a:avLst/>
+              </a:prstGeom>
+              <a:noFill/>
+              <a:extLst>
+                <a:ext uri="{909E8E84-426E-40DD-AFC4-6F175D3DCCD1}">
+                  <a14:hiddenFill xmlns:a14="http://schemas.microsoft.com/office/drawing/2010/main">
+                    <a:solidFill>
+                      <a:srgbClr val="FFFFFF"/>
+                    </a:solidFill>
+                  </a14:hiddenFill>
+                </a:ext>
+              </a:extLst>
+            </p:spPr>
+          </p:pic>
+        </p:grpSp>
+        <p:sp>
+          <p:nvSpPr>
+            <p:cNvPr id="24" name="文字方塊 23">
+              <a:extLst>
+                <a:ext uri="{FF2B5EF4-FFF2-40B4-BE49-F238E27FC236}">
+                  <a16:creationId xmlns:a16="http://schemas.microsoft.com/office/drawing/2014/main" id="{147452DA-8092-4A9C-AA22-5052766EB861}"/>
+                </a:ext>
+              </a:extLst>
+            </p:cNvPr>
+            <p:cNvSpPr txBox="1"/>
+            <p:nvPr/>
+          </p:nvSpPr>
+          <p:spPr>
+            <a:xfrm rot="16200000">
+              <a:off x="3509116" y="2346248"/>
+              <a:ext cx="1833966" cy="400110"/>
+            </a:xfrm>
+            <a:prstGeom prst="rect">
+              <a:avLst/>
+            </a:prstGeom>
+            <a:noFill/>
+          </p:spPr>
+          <p:txBody>
+            <a:bodyPr wrap="square" rtlCol="0">
+              <a:spAutoFit/>
+            </a:bodyPr>
+            <a:lstStyle/>
+            <a:p>
+              <a:pPr algn="ctr"/>
+              <a:r>
+                <a:rPr lang="en-US" altLang="zh-TW" sz="2000" dirty="0">
+                  <a:latin typeface="Times New Roman" panose="02020603050405020304" pitchFamily="18" charset="0"/>
+                  <a:cs typeface="Times New Roman" panose="02020603050405020304" pitchFamily="18" charset="0"/>
+                </a:rPr>
+                <a:t>Light-cone</a:t>
+              </a:r>
+            </a:p>
+          </p:txBody>
+        </p:sp>
+        <mc:AlternateContent xmlns:mc="http://schemas.openxmlformats.org/markup-compatibility/2006" xmlns:a14="http://schemas.microsoft.com/office/drawing/2010/main">
+          <mc:Choice Requires="a14">
+            <p:sp>
+              <p:nvSpPr>
+                <p:cNvPr id="25" name="文字方塊 24">
+                  <a:extLst>
+                    <a:ext uri="{FF2B5EF4-FFF2-40B4-BE49-F238E27FC236}">
+                      <a16:creationId xmlns:a16="http://schemas.microsoft.com/office/drawing/2014/main" id="{C6F1DFFA-8C20-48D5-8C41-CA1BB2D4A5B6}"/>
+                    </a:ext>
+                  </a:extLst>
+                </p:cNvPr>
+                <p:cNvSpPr txBox="1"/>
+                <p:nvPr/>
+              </p:nvSpPr>
+              <p:spPr>
+                <a:xfrm>
+                  <a:off x="1686723" y="2895776"/>
+                  <a:ext cx="151686" cy="400110"/>
+                </a:xfrm>
+                <a:prstGeom prst="rect">
+                  <a:avLst/>
+                </a:prstGeom>
+                <a:noFill/>
+              </p:spPr>
+              <p:txBody>
+                <a:bodyPr wrap="square" rtlCol="0">
+                  <a:spAutoFit/>
+                </a:bodyPr>
+                <a:lstStyle/>
+                <a:p>
+                  <a:pPr algn="ctr"/>
+                  <a14:m>
+                    <m:oMathPara xmlns:m="http://schemas.openxmlformats.org/officeDocument/2006/math">
+                      <m:oMathParaPr>
+                        <m:jc m:val="centerGroup"/>
+                      </m:oMathParaPr>
+                      <m:oMath xmlns:m="http://schemas.openxmlformats.org/officeDocument/2006/math">
+                        <m:r>
+                          <a:rPr lang="en-US" altLang="zh-TW" sz="2000" b="1" i="1" dirty="0">
+                            <a:latin typeface="Cambria Math" panose="02040503050406030204" pitchFamily="18" charset="0"/>
+                            <a:cs typeface="Times New Roman" panose="02020603050405020304" pitchFamily="18" charset="0"/>
+                          </a:rPr>
+                          <m:t>𝒌</m:t>
+                        </m:r>
+                      </m:oMath>
+                    </m:oMathPara>
+                  </a14:m>
+                  <a:endParaRPr lang="zh-TW" altLang="en-US" sz="2000" b="1" dirty="0">
+                    <a:latin typeface="Times New Roman" panose="02020603050405020304" pitchFamily="18" charset="0"/>
+                    <a:cs typeface="Times New Roman" panose="02020603050405020304" pitchFamily="18" charset="0"/>
+                  </a:endParaRPr>
+                </a:p>
+              </p:txBody>
+            </p:sp>
+          </mc:Choice>
+          <mc:Fallback xmlns="">
+            <p:sp>
+              <p:nvSpPr>
+                <p:cNvPr id="25" name="文字方塊 24">
+                  <a:extLst>
+                    <a:ext uri="{FF2B5EF4-FFF2-40B4-BE49-F238E27FC236}">
+                      <a16:creationId xmlns:a16="http://schemas.microsoft.com/office/drawing/2014/main" id="{C6F1DFFA-8C20-48D5-8C41-CA1BB2D4A5B6}"/>
+                    </a:ext>
+                  </a:extLst>
+                </p:cNvPr>
+                <p:cNvSpPr txBox="1">
+                  <a:spLocks noRot="1" noChangeAspect="1" noMove="1" noResize="1" noEditPoints="1" noAdjustHandles="1" noChangeArrowheads="1" noChangeShapeType="1" noTextEdit="1"/>
+                </p:cNvSpPr>
+                <p:nvPr/>
+              </p:nvSpPr>
+              <p:spPr>
+                <a:xfrm>
+                  <a:off x="1686723" y="2895776"/>
+                  <a:ext cx="151686" cy="400110"/>
+                </a:xfrm>
+                <a:prstGeom prst="rect">
+                  <a:avLst/>
+                </a:prstGeom>
+                <a:blipFill>
+                  <a:blip r:embed="rId8"/>
+                  <a:stretch>
+                    <a:fillRect l="-84000" r="-44000"/>
+                  </a:stretch>
+                </a:blipFill>
+              </p:spPr>
+              <p:txBody>
+                <a:bodyPr/>
+                <a:lstStyle/>
+                <a:p>
+                  <a:r>
+                    <a:rPr lang="zh-TW" altLang="en-US">
+                      <a:noFill/>
+                    </a:rPr>
+                    <a:t> </a:t>
+                  </a:r>
+                </a:p>
+              </p:txBody>
+            </p:sp>
+          </mc:Fallback>
+        </mc:AlternateContent>
+        <mc:AlternateContent xmlns:mc="http://schemas.openxmlformats.org/markup-compatibility/2006" xmlns:a14="http://schemas.microsoft.com/office/drawing/2010/main">
+          <mc:Choice Requires="a14">
+            <p:sp>
+              <p:nvSpPr>
+                <p:cNvPr id="26" name="矩形 25">
+                  <a:extLst>
+                    <a:ext uri="{FF2B5EF4-FFF2-40B4-BE49-F238E27FC236}">
+                      <a16:creationId xmlns:a16="http://schemas.microsoft.com/office/drawing/2014/main" id="{62D3C3CF-91FD-4580-B91C-AD2BE2479841}"/>
+                    </a:ext>
+                  </a:extLst>
+                </p:cNvPr>
+                <p:cNvSpPr/>
+                <p:nvPr/>
+              </p:nvSpPr>
+              <p:spPr>
+                <a:xfrm>
+                  <a:off x="8675829" y="2263957"/>
+                  <a:ext cx="1142603" cy="400110"/>
+                </a:xfrm>
+                <a:prstGeom prst="rect">
+                  <a:avLst/>
+                </a:prstGeom>
+              </p:spPr>
+              <p:txBody>
+                <a:bodyPr wrap="square">
+                  <a:spAutoFit/>
+                </a:bodyPr>
+                <a:lstStyle/>
+                <a:p>
+                  <a:pPr algn="ctr"/>
+                  <a14:m>
+                    <m:oMathPara xmlns:m="http://schemas.openxmlformats.org/officeDocument/2006/math">
+                      <m:oMathParaPr>
+                        <m:jc m:val="centerGroup"/>
+                      </m:oMathParaPr>
+                      <m:oMath xmlns:m="http://schemas.openxmlformats.org/officeDocument/2006/math">
+                        <m:r>
+                          <a:rPr lang="en-US" altLang="zh-TW" sz="2000" b="1" i="1">
+                            <a:latin typeface="Cambria Math" panose="02040503050406030204" pitchFamily="18" charset="0"/>
+                            <a:cs typeface="Times New Roman" panose="02020603050405020304" pitchFamily="18" charset="0"/>
+                          </a:rPr>
+                          <m:t>𝑸</m:t>
+                        </m:r>
+                        <m:r>
+                          <a:rPr lang="en-US" altLang="zh-TW" sz="2000" i="1">
+                            <a:latin typeface="Cambria Math" panose="02040503050406030204" pitchFamily="18" charset="0"/>
+                            <a:ea typeface="Cambria Math" panose="02040503050406030204" pitchFamily="18" charset="0"/>
+                            <a:cs typeface="Times New Roman" panose="02020603050405020304" pitchFamily="18" charset="0"/>
+                          </a:rPr>
+                          <m:t>≈</m:t>
+                        </m:r>
+                        <m:sSub>
+                          <m:sSubPr>
+                            <m:ctrlPr>
+                              <a:rPr lang="en-US" altLang="zh-TW" sz="2000" b="1" i="1" dirty="0">
+                                <a:latin typeface="Cambria Math" panose="02040503050406030204" pitchFamily="18" charset="0"/>
+                                <a:cs typeface="Times New Roman" panose="02020603050405020304" pitchFamily="18" charset="0"/>
+                              </a:rPr>
+                            </m:ctrlPr>
+                          </m:sSubPr>
+                          <m:e>
+                            <m:r>
+                              <a:rPr lang="en-US" altLang="zh-TW" sz="2000" b="1" i="1" dirty="0">
+                                <a:latin typeface="Cambria Math" panose="02040503050406030204" pitchFamily="18" charset="0"/>
+                                <a:cs typeface="Times New Roman" panose="02020603050405020304" pitchFamily="18" charset="0"/>
+                              </a:rPr>
+                              <m:t>𝑸</m:t>
+                            </m:r>
+                          </m:e>
+                          <m:sub>
+                            <m:r>
+                              <a:rPr lang="en-US" altLang="zh-TW" sz="2000" b="1" i="1" dirty="0">
+                                <a:latin typeface="Cambria Math" panose="02040503050406030204" pitchFamily="18" charset="0"/>
+                                <a:cs typeface="Times New Roman" panose="02020603050405020304" pitchFamily="18" charset="0"/>
+                              </a:rPr>
+                              <m:t>𝑪</m:t>
+                            </m:r>
+                          </m:sub>
+                        </m:sSub>
+                      </m:oMath>
+                    </m:oMathPara>
+                  </a14:m>
+                  <a:endParaRPr lang="zh-TW" altLang="en-US" sz="2000" dirty="0">
+                    <a:latin typeface="Times New Roman" panose="02020603050405020304" pitchFamily="18" charset="0"/>
+                    <a:cs typeface="Times New Roman" panose="02020603050405020304" pitchFamily="18" charset="0"/>
+                  </a:endParaRPr>
+                </a:p>
+              </p:txBody>
+            </p:sp>
+          </mc:Choice>
+          <mc:Fallback xmlns="">
+            <p:sp>
+              <p:nvSpPr>
+                <p:cNvPr id="26" name="矩形 25">
+                  <a:extLst>
+                    <a:ext uri="{FF2B5EF4-FFF2-40B4-BE49-F238E27FC236}">
+                      <a16:creationId xmlns:a16="http://schemas.microsoft.com/office/drawing/2014/main" id="{62D3C3CF-91FD-4580-B91C-AD2BE2479841}"/>
+                    </a:ext>
+                  </a:extLst>
+                </p:cNvPr>
+                <p:cNvSpPr>
+                  <a:spLocks noRot="1" noChangeAspect="1" noMove="1" noResize="1" noEditPoints="1" noAdjustHandles="1" noChangeArrowheads="1" noChangeShapeType="1" noTextEdit="1"/>
+                </p:cNvSpPr>
+                <p:nvPr/>
+              </p:nvSpPr>
+              <p:spPr>
+                <a:xfrm>
+                  <a:off x="8675829" y="2263957"/>
+                  <a:ext cx="1142603" cy="400110"/>
+                </a:xfrm>
+                <a:prstGeom prst="rect">
+                  <a:avLst/>
+                </a:prstGeom>
+                <a:blipFill>
+                  <a:blip r:embed="rId9"/>
+                  <a:stretch>
+                    <a:fillRect b="-13846"/>
+                  </a:stretch>
+                </a:blipFill>
+              </p:spPr>
+              <p:txBody>
+                <a:bodyPr/>
+                <a:lstStyle/>
+                <a:p>
+                  <a:r>
+                    <a:rPr lang="zh-TW" altLang="en-US">
+                      <a:noFill/>
+                    </a:rPr>
+                    <a:t> </a:t>
+                  </a:r>
+                </a:p>
+              </p:txBody>
+            </p:sp>
+          </mc:Fallback>
+        </mc:AlternateContent>
+        <mc:AlternateContent xmlns:mc="http://schemas.openxmlformats.org/markup-compatibility/2006" xmlns:a14="http://schemas.microsoft.com/office/drawing/2010/main">
+          <mc:Choice Requires="a14">
+            <p:sp>
+              <p:nvSpPr>
+                <p:cNvPr id="27" name="文字方塊 26">
+                  <a:extLst>
+                    <a:ext uri="{FF2B5EF4-FFF2-40B4-BE49-F238E27FC236}">
+                      <a16:creationId xmlns:a16="http://schemas.microsoft.com/office/drawing/2014/main" id="{6C00DEFA-3A50-4AF2-9896-978B45A08C9E}"/>
+                    </a:ext>
+                  </a:extLst>
+                </p:cNvPr>
+                <p:cNvSpPr txBox="1"/>
+                <p:nvPr/>
+              </p:nvSpPr>
+              <p:spPr>
+                <a:xfrm>
+                  <a:off x="6664066" y="963289"/>
+                  <a:ext cx="264767" cy="400110"/>
+                </a:xfrm>
+                <a:prstGeom prst="rect">
+                  <a:avLst/>
+                </a:prstGeom>
+                <a:noFill/>
+              </p:spPr>
+              <p:txBody>
+                <a:bodyPr wrap="square" rtlCol="0">
+                  <a:spAutoFit/>
+                </a:bodyPr>
+                <a:lstStyle/>
+                <a:p>
+                  <a:pPr algn="ctr"/>
+                  <a14:m>
+                    <m:oMathPara xmlns:m="http://schemas.openxmlformats.org/officeDocument/2006/math">
+                      <m:oMathParaPr>
+                        <m:jc m:val="centerGroup"/>
+                      </m:oMathParaPr>
+                      <m:oMath xmlns:m="http://schemas.openxmlformats.org/officeDocument/2006/math">
+                        <m:r>
+                          <a:rPr lang="en-US" altLang="zh-TW" sz="2000" i="1" dirty="0">
+                            <a:latin typeface="Cambria Math" panose="02040503050406030204" pitchFamily="18" charset="0"/>
+                            <a:cs typeface="Times New Roman" panose="02020603050405020304" pitchFamily="18" charset="0"/>
+                          </a:rPr>
+                          <m:t>𝜃</m:t>
+                        </m:r>
+                      </m:oMath>
+                    </m:oMathPara>
+                  </a14:m>
+                  <a:endParaRPr lang="zh-TW" altLang="en-US" sz="2000" dirty="0">
+                    <a:latin typeface="Times New Roman" panose="02020603050405020304" pitchFamily="18" charset="0"/>
+                    <a:cs typeface="Times New Roman" panose="02020603050405020304" pitchFamily="18" charset="0"/>
+                  </a:endParaRPr>
+                </a:p>
+              </p:txBody>
+            </p:sp>
+          </mc:Choice>
+          <mc:Fallback xmlns="">
+            <p:sp>
+              <p:nvSpPr>
+                <p:cNvPr id="27" name="文字方塊 26">
+                  <a:extLst>
+                    <a:ext uri="{FF2B5EF4-FFF2-40B4-BE49-F238E27FC236}">
+                      <a16:creationId xmlns:a16="http://schemas.microsoft.com/office/drawing/2014/main" id="{6C00DEFA-3A50-4AF2-9896-978B45A08C9E}"/>
+                    </a:ext>
+                  </a:extLst>
+                </p:cNvPr>
+                <p:cNvSpPr txBox="1">
+                  <a:spLocks noRot="1" noChangeAspect="1" noMove="1" noResize="1" noEditPoints="1" noAdjustHandles="1" noChangeArrowheads="1" noChangeShapeType="1" noTextEdit="1"/>
+                </p:cNvSpPr>
+                <p:nvPr/>
+              </p:nvSpPr>
+              <p:spPr>
+                <a:xfrm>
+                  <a:off x="6664066" y="963289"/>
+                  <a:ext cx="264767" cy="400110"/>
+                </a:xfrm>
+                <a:prstGeom prst="rect">
+                  <a:avLst/>
+                </a:prstGeom>
+                <a:blipFill>
+                  <a:blip r:embed="rId10"/>
+                  <a:stretch>
+                    <a:fillRect l="-25000"/>
+                  </a:stretch>
+                </a:blipFill>
+              </p:spPr>
+              <p:txBody>
+                <a:bodyPr/>
+                <a:lstStyle/>
+                <a:p>
+                  <a:r>
+                    <a:rPr lang="zh-TW" altLang="en-US">
+                      <a:noFill/>
+                    </a:rPr>
+                    <a:t> </a:t>
+                  </a:r>
+                </a:p>
+              </p:txBody>
+            </p:sp>
+          </mc:Fallback>
+        </mc:AlternateContent>
+        <mc:AlternateContent xmlns:mc="http://schemas.openxmlformats.org/markup-compatibility/2006" xmlns:a14="http://schemas.microsoft.com/office/drawing/2010/main">
+          <mc:Choice Requires="a14">
+            <p:sp>
+              <p:nvSpPr>
+                <p:cNvPr id="28" name="文字方塊 27">
+                  <a:extLst>
+                    <a:ext uri="{FF2B5EF4-FFF2-40B4-BE49-F238E27FC236}">
+                      <a16:creationId xmlns:a16="http://schemas.microsoft.com/office/drawing/2014/main" id="{10A0BBFC-804E-457D-A94B-236800B38D35}"/>
+                    </a:ext>
+                  </a:extLst>
+                </p:cNvPr>
+                <p:cNvSpPr txBox="1"/>
+                <p:nvPr/>
+              </p:nvSpPr>
+              <p:spPr>
+                <a:xfrm>
+                  <a:off x="4527205" y="1828950"/>
+                  <a:ext cx="898164" cy="400110"/>
+                </a:xfrm>
+                <a:prstGeom prst="rect">
+                  <a:avLst/>
+                </a:prstGeom>
+                <a:noFill/>
+              </p:spPr>
+              <p:txBody>
+                <a:bodyPr wrap="square" rtlCol="0">
+                  <a:spAutoFit/>
+                </a:bodyPr>
+                <a:lstStyle/>
+                <a:p>
+                  <a:pPr algn="ctr"/>
+                  <a14:m>
+                    <m:oMathPara xmlns:m="http://schemas.openxmlformats.org/officeDocument/2006/math">
+                      <m:oMathParaPr>
+                        <m:jc m:val="centerGroup"/>
+                      </m:oMathParaPr>
+                      <m:oMath xmlns:m="http://schemas.openxmlformats.org/officeDocument/2006/math">
+                        <m:r>
+                          <a:rPr lang="en-US" altLang="zh-TW" sz="2000" i="1" dirty="0">
+                            <a:latin typeface="Cambria Math" panose="02040503050406030204" pitchFamily="18" charset="0"/>
+                            <a:cs typeface="Times New Roman" panose="02020603050405020304" pitchFamily="18" charset="0"/>
+                          </a:rPr>
+                          <m:t>𝜃</m:t>
+                        </m:r>
+                        <m:r>
+                          <a:rPr lang="en-US" altLang="zh-TW" sz="2000" b="1" i="1">
+                            <a:latin typeface="Cambria Math" panose="02040503050406030204" pitchFamily="18" charset="0"/>
+                            <a:ea typeface="Cambria Math" panose="02040503050406030204" pitchFamily="18" charset="0"/>
+                            <a:cs typeface="Times New Roman" panose="02020603050405020304" pitchFamily="18" charset="0"/>
+                          </a:rPr>
+                          <m:t>≈</m:t>
+                        </m:r>
+                        <m:r>
+                          <a:rPr lang="en-US" altLang="zh-TW" sz="2000" i="1" dirty="0">
+                            <a:latin typeface="Cambria Math" panose="02040503050406030204" pitchFamily="18" charset="0"/>
+                            <a:cs typeface="Times New Roman" panose="02020603050405020304" pitchFamily="18" charset="0"/>
+                          </a:rPr>
+                          <m:t>0</m:t>
+                        </m:r>
+                      </m:oMath>
+                    </m:oMathPara>
+                  </a14:m>
+                  <a:endParaRPr lang="zh-TW" altLang="en-US" sz="2000" dirty="0">
+                    <a:latin typeface="Times New Roman" panose="02020603050405020304" pitchFamily="18" charset="0"/>
+                    <a:cs typeface="Times New Roman" panose="02020603050405020304" pitchFamily="18" charset="0"/>
+                  </a:endParaRPr>
+                </a:p>
+              </p:txBody>
+            </p:sp>
+          </mc:Choice>
+          <mc:Fallback xmlns="">
+            <p:sp>
+              <p:nvSpPr>
+                <p:cNvPr id="28" name="文字方塊 27">
+                  <a:extLst>
+                    <a:ext uri="{FF2B5EF4-FFF2-40B4-BE49-F238E27FC236}">
+                      <a16:creationId xmlns:a16="http://schemas.microsoft.com/office/drawing/2014/main" id="{10A0BBFC-804E-457D-A94B-236800B38D35}"/>
+                    </a:ext>
+                  </a:extLst>
+                </p:cNvPr>
+                <p:cNvSpPr txBox="1">
+                  <a:spLocks noRot="1" noChangeAspect="1" noMove="1" noResize="1" noEditPoints="1" noAdjustHandles="1" noChangeArrowheads="1" noChangeShapeType="1" noTextEdit="1"/>
+                </p:cNvSpPr>
+                <p:nvPr/>
+              </p:nvSpPr>
+              <p:spPr>
+                <a:xfrm>
+                  <a:off x="4527205" y="1828950"/>
+                  <a:ext cx="898164" cy="400110"/>
+                </a:xfrm>
+                <a:prstGeom prst="rect">
+                  <a:avLst/>
+                </a:prstGeom>
+                <a:blipFill>
+                  <a:blip r:embed="rId11"/>
+                  <a:stretch>
+                    <a:fillRect/>
+                  </a:stretch>
+                </a:blipFill>
+              </p:spPr>
+              <p:txBody>
+                <a:bodyPr/>
+                <a:lstStyle/>
+                <a:p>
+                  <a:r>
+                    <a:rPr lang="zh-TW" altLang="en-US">
+                      <a:noFill/>
+                    </a:rPr>
+                    <a:t> </a:t>
+                  </a:r>
+                </a:p>
+              </p:txBody>
+            </p:sp>
+          </mc:Fallback>
+        </mc:AlternateContent>
+        <mc:AlternateContent xmlns:mc="http://schemas.openxmlformats.org/markup-compatibility/2006" xmlns:a14="http://schemas.microsoft.com/office/drawing/2010/main">
+          <mc:Choice Requires="a14">
+            <p:sp>
+              <p:nvSpPr>
+                <p:cNvPr id="29" name="文字方塊 28">
+                  <a:extLst>
+                    <a:ext uri="{FF2B5EF4-FFF2-40B4-BE49-F238E27FC236}">
+                      <a16:creationId xmlns:a16="http://schemas.microsoft.com/office/drawing/2014/main" id="{1EF0AFE9-A651-4A31-986C-A885ED533527}"/>
+                    </a:ext>
+                  </a:extLst>
+                </p:cNvPr>
+                <p:cNvSpPr txBox="1"/>
+                <p:nvPr/>
+              </p:nvSpPr>
+              <p:spPr>
+                <a:xfrm>
+                  <a:off x="8737294" y="1826905"/>
+                  <a:ext cx="972699" cy="400110"/>
+                </a:xfrm>
+                <a:prstGeom prst="rect">
+                  <a:avLst/>
+                </a:prstGeom>
+                <a:noFill/>
+              </p:spPr>
+              <p:txBody>
+                <a:bodyPr wrap="square" rtlCol="0">
+                  <a:spAutoFit/>
+                </a:bodyPr>
+                <a:lstStyle/>
+                <a:p>
+                  <a:pPr algn="ctr"/>
+                  <a14:m>
+                    <m:oMathPara xmlns:m="http://schemas.openxmlformats.org/officeDocument/2006/math">
+                      <m:oMathParaPr>
+                        <m:jc m:val="centerGroup"/>
+                      </m:oMathParaPr>
+                      <m:oMath xmlns:m="http://schemas.openxmlformats.org/officeDocument/2006/math">
+                        <m:r>
+                          <a:rPr lang="en-US" altLang="zh-TW" sz="2000" i="1" dirty="0">
+                            <a:latin typeface="Cambria Math" panose="02040503050406030204" pitchFamily="18" charset="0"/>
+                            <a:cs typeface="Times New Roman" panose="02020603050405020304" pitchFamily="18" charset="0"/>
+                          </a:rPr>
+                          <m:t>𝜃</m:t>
+                        </m:r>
+                        <m:r>
+                          <a:rPr lang="en-US" altLang="zh-TW" sz="2000" b="1" i="1">
+                            <a:latin typeface="Cambria Math" panose="02040503050406030204" pitchFamily="18" charset="0"/>
+                            <a:ea typeface="Cambria Math" panose="02040503050406030204" pitchFamily="18" charset="0"/>
+                            <a:cs typeface="Times New Roman" panose="02020603050405020304" pitchFamily="18" charset="0"/>
+                          </a:rPr>
+                          <m:t>≈</m:t>
+                        </m:r>
+                        <m:r>
+                          <a:rPr lang="en-US" altLang="zh-TW" sz="2000" i="1" dirty="0">
+                            <a:latin typeface="Cambria Math" panose="02040503050406030204" pitchFamily="18" charset="0"/>
+                            <a:cs typeface="Times New Roman" panose="02020603050405020304" pitchFamily="18" charset="0"/>
+                          </a:rPr>
+                          <m:t>𝜋</m:t>
+                        </m:r>
+                      </m:oMath>
+                    </m:oMathPara>
+                  </a14:m>
+                  <a:endParaRPr lang="zh-TW" altLang="en-US" sz="2000" dirty="0">
+                    <a:latin typeface="Times New Roman" panose="02020603050405020304" pitchFamily="18" charset="0"/>
+                    <a:cs typeface="Times New Roman" panose="02020603050405020304" pitchFamily="18" charset="0"/>
+                  </a:endParaRPr>
+                </a:p>
+              </p:txBody>
+            </p:sp>
+          </mc:Choice>
+          <mc:Fallback xmlns="">
+            <p:sp>
+              <p:nvSpPr>
+                <p:cNvPr id="29" name="文字方塊 28">
+                  <a:extLst>
+                    <a:ext uri="{FF2B5EF4-FFF2-40B4-BE49-F238E27FC236}">
+                      <a16:creationId xmlns:a16="http://schemas.microsoft.com/office/drawing/2014/main" id="{1EF0AFE9-A651-4A31-986C-A885ED533527}"/>
+                    </a:ext>
+                  </a:extLst>
+                </p:cNvPr>
+                <p:cNvSpPr txBox="1">
+                  <a:spLocks noRot="1" noChangeAspect="1" noMove="1" noResize="1" noEditPoints="1" noAdjustHandles="1" noChangeArrowheads="1" noChangeShapeType="1" noTextEdit="1"/>
+                </p:cNvSpPr>
+                <p:nvPr/>
+              </p:nvSpPr>
+              <p:spPr>
+                <a:xfrm>
+                  <a:off x="8737294" y="1826905"/>
+                  <a:ext cx="972699" cy="400110"/>
+                </a:xfrm>
+                <a:prstGeom prst="rect">
+                  <a:avLst/>
+                </a:prstGeom>
+                <a:blipFill>
+                  <a:blip r:embed="rId12"/>
+                  <a:stretch>
+                    <a:fillRect/>
+                  </a:stretch>
+                </a:blipFill>
+              </p:spPr>
+              <p:txBody>
+                <a:bodyPr/>
+                <a:lstStyle/>
+                <a:p>
+                  <a:r>
+                    <a:rPr lang="zh-TW" altLang="en-US">
+                      <a:noFill/>
+                    </a:rPr>
+                    <a:t> </a:t>
+                  </a:r>
+                </a:p>
+              </p:txBody>
+            </p:sp>
+          </mc:Fallback>
+        </mc:AlternateContent>
+        <mc:AlternateContent xmlns:mc="http://schemas.openxmlformats.org/markup-compatibility/2006" xmlns:a14="http://schemas.microsoft.com/office/drawing/2010/main">
+          <mc:Choice Requires="a14">
+            <p:sp>
+              <p:nvSpPr>
+                <p:cNvPr id="30" name="矩形 29">
+                  <a:extLst>
+                    <a:ext uri="{FF2B5EF4-FFF2-40B4-BE49-F238E27FC236}">
+                      <a16:creationId xmlns:a16="http://schemas.microsoft.com/office/drawing/2014/main" id="{E8E49E26-DE15-40C0-8C7C-E92E4757FBCE}"/>
+                    </a:ext>
+                  </a:extLst>
+                </p:cNvPr>
+                <p:cNvSpPr/>
+                <p:nvPr/>
+              </p:nvSpPr>
+              <p:spPr>
+                <a:xfrm>
+                  <a:off x="4487999" y="2263957"/>
+                  <a:ext cx="944989" cy="400110"/>
+                </a:xfrm>
+                <a:prstGeom prst="rect">
+                  <a:avLst/>
+                </a:prstGeom>
+              </p:spPr>
+              <p:txBody>
+                <a:bodyPr wrap="square">
+                  <a:spAutoFit/>
+                </a:bodyPr>
+                <a:lstStyle/>
+                <a:p>
+                  <a:pPr algn="ctr"/>
+                  <a14:m>
+                    <m:oMathPara xmlns:m="http://schemas.openxmlformats.org/officeDocument/2006/math">
+                      <m:oMathParaPr>
+                        <m:jc m:val="centerGroup"/>
+                      </m:oMathParaPr>
+                      <m:oMath xmlns:m="http://schemas.openxmlformats.org/officeDocument/2006/math">
+                        <m:r>
+                          <a:rPr lang="en-US" altLang="zh-TW" sz="2000" b="1" i="1">
+                            <a:latin typeface="Cambria Math" panose="02040503050406030204" pitchFamily="18" charset="0"/>
+                            <a:cs typeface="Times New Roman" panose="02020603050405020304" pitchFamily="18" charset="0"/>
+                          </a:rPr>
+                          <m:t>𝑸</m:t>
+                        </m:r>
+                        <m:r>
+                          <a:rPr lang="en-US" altLang="zh-TW" sz="2000" b="1" i="1">
+                            <a:latin typeface="Cambria Math" panose="02040503050406030204" pitchFamily="18" charset="0"/>
+                            <a:cs typeface="Times New Roman" panose="02020603050405020304" pitchFamily="18" charset="0"/>
+                          </a:rPr>
+                          <m:t> ≈</m:t>
+                        </m:r>
+                        <m:r>
+                          <a:rPr lang="en-US" altLang="zh-TW" sz="2000" i="1">
+                            <a:latin typeface="Cambria Math" panose="02040503050406030204" pitchFamily="18" charset="0"/>
+                            <a:ea typeface="Cambria Math" panose="02040503050406030204" pitchFamily="18" charset="0"/>
+                            <a:cs typeface="Times New Roman" panose="02020603050405020304" pitchFamily="18" charset="0"/>
+                          </a:rPr>
+                          <m:t>0</m:t>
+                        </m:r>
+                      </m:oMath>
+                    </m:oMathPara>
+                  </a14:m>
+                  <a:endParaRPr lang="zh-TW" altLang="en-US" sz="2000" dirty="0">
+                    <a:latin typeface="Times New Roman" panose="02020603050405020304" pitchFamily="18" charset="0"/>
+                    <a:cs typeface="Times New Roman" panose="02020603050405020304" pitchFamily="18" charset="0"/>
+                  </a:endParaRPr>
+                </a:p>
+              </p:txBody>
+            </p:sp>
+          </mc:Choice>
+          <mc:Fallback xmlns="">
+            <p:sp>
+              <p:nvSpPr>
+                <p:cNvPr id="30" name="矩形 29">
+                  <a:extLst>
+                    <a:ext uri="{FF2B5EF4-FFF2-40B4-BE49-F238E27FC236}">
+                      <a16:creationId xmlns:a16="http://schemas.microsoft.com/office/drawing/2014/main" id="{E8E49E26-DE15-40C0-8C7C-E92E4757FBCE}"/>
+                    </a:ext>
+                  </a:extLst>
+                </p:cNvPr>
+                <p:cNvSpPr>
+                  <a:spLocks noRot="1" noChangeAspect="1" noMove="1" noResize="1" noEditPoints="1" noAdjustHandles="1" noChangeArrowheads="1" noChangeShapeType="1" noTextEdit="1"/>
+                </p:cNvSpPr>
+                <p:nvPr/>
+              </p:nvSpPr>
+              <p:spPr>
+                <a:xfrm>
+                  <a:off x="4487999" y="2263957"/>
+                  <a:ext cx="944989" cy="400110"/>
+                </a:xfrm>
+                <a:prstGeom prst="rect">
+                  <a:avLst/>
+                </a:prstGeom>
+                <a:blipFill>
+                  <a:blip r:embed="rId13"/>
+                  <a:stretch>
+                    <a:fillRect l="-2581" b="-13846"/>
+                  </a:stretch>
+                </a:blipFill>
+              </p:spPr>
+              <p:txBody>
+                <a:bodyPr/>
+                <a:lstStyle/>
+                <a:p>
+                  <a:r>
+                    <a:rPr lang="zh-TW" altLang="en-US">
+                      <a:noFill/>
+                    </a:rPr>
+                    <a:t> </a:t>
+                  </a:r>
+                </a:p>
+              </p:txBody>
+            </p:sp>
+          </mc:Fallback>
+        </mc:AlternateContent>
+        <p:cxnSp>
+          <p:nvCxnSpPr>
+            <p:cNvPr id="31" name="直線接點 30">
+              <a:extLst>
+                <a:ext uri="{FF2B5EF4-FFF2-40B4-BE49-F238E27FC236}">
+                  <a16:creationId xmlns:a16="http://schemas.microsoft.com/office/drawing/2014/main" id="{24B4BAAA-6FB0-4361-B7B1-27D07E16E601}"/>
+                </a:ext>
+              </a:extLst>
+            </p:cNvPr>
+            <p:cNvCxnSpPr>
+              <a:cxnSpLocks/>
+            </p:cNvCxnSpPr>
+            <p:nvPr/>
+          </p:nvCxnSpPr>
+          <p:spPr>
+            <a:xfrm>
+              <a:off x="2238937" y="1071601"/>
+              <a:ext cx="0" cy="1828239"/>
+            </a:xfrm>
+            <a:prstGeom prst="line">
+              <a:avLst/>
+            </a:prstGeom>
+            <a:ln w="38100">
+              <a:solidFill>
+                <a:schemeClr val="tx1"/>
+              </a:solidFill>
+              <a:prstDash val="sysDot"/>
+            </a:ln>
+          </p:spPr>
+          <p:style>
+            <a:lnRef idx="1">
+              <a:schemeClr val="accent1"/>
+            </a:lnRef>
+            <a:fillRef idx="0">
+              <a:schemeClr val="accent1"/>
+            </a:fillRef>
+            <a:effectRef idx="0">
+              <a:schemeClr val="accent1"/>
+            </a:effectRef>
+            <a:fontRef idx="minor">
+              <a:schemeClr val="tx1"/>
+            </a:fontRef>
+          </p:style>
+        </p:cxnSp>
+        <p:cxnSp>
+          <p:nvCxnSpPr>
+            <p:cNvPr id="32" name="直線接點 31">
+              <a:extLst>
+                <a:ext uri="{FF2B5EF4-FFF2-40B4-BE49-F238E27FC236}">
+                  <a16:creationId xmlns:a16="http://schemas.microsoft.com/office/drawing/2014/main" id="{C5DBA5FF-AAC3-41BF-9291-E5630E2D6494}"/>
+                </a:ext>
+              </a:extLst>
+            </p:cNvPr>
+            <p:cNvCxnSpPr>
+              <a:cxnSpLocks/>
+            </p:cNvCxnSpPr>
+            <p:nvPr/>
+          </p:nvCxnSpPr>
+          <p:spPr>
+            <a:xfrm>
+              <a:off x="1744363" y="2184926"/>
+              <a:ext cx="0" cy="720088"/>
+            </a:xfrm>
+            <a:prstGeom prst="line">
+              <a:avLst/>
+            </a:prstGeom>
+            <a:ln w="38100">
+              <a:solidFill>
+                <a:schemeClr val="tx1"/>
+              </a:solidFill>
+              <a:prstDash val="sysDot"/>
+            </a:ln>
+          </p:spPr>
+          <p:style>
+            <a:lnRef idx="1">
+              <a:schemeClr val="accent1"/>
+            </a:lnRef>
+            <a:fillRef idx="0">
+              <a:schemeClr val="accent1"/>
+            </a:fillRef>
+            <a:effectRef idx="0">
+              <a:schemeClr val="accent1"/>
+            </a:effectRef>
+            <a:fontRef idx="minor">
+              <a:schemeClr val="tx1"/>
+            </a:fontRef>
+          </p:style>
+        </p:cxnSp>
+        <mc:AlternateContent xmlns:mc="http://schemas.openxmlformats.org/markup-compatibility/2006" xmlns:a14="http://schemas.microsoft.com/office/drawing/2010/main">
+          <mc:Choice Requires="a14">
+            <p:sp>
+              <p:nvSpPr>
+                <p:cNvPr id="33" name="文字方塊 32">
+                  <a:extLst>
+                    <a:ext uri="{FF2B5EF4-FFF2-40B4-BE49-F238E27FC236}">
+                      <a16:creationId xmlns:a16="http://schemas.microsoft.com/office/drawing/2014/main" id="{1D4615AA-66BC-426E-AA33-28132F45955C}"/>
+                    </a:ext>
+                  </a:extLst>
+                </p:cNvPr>
+                <p:cNvSpPr txBox="1"/>
+                <p:nvPr/>
+              </p:nvSpPr>
+              <p:spPr>
+                <a:xfrm>
+                  <a:off x="1983257" y="2895776"/>
+                  <a:ext cx="842485" cy="400110"/>
+                </a:xfrm>
+                <a:prstGeom prst="rect">
+                  <a:avLst/>
+                </a:prstGeom>
+                <a:noFill/>
+              </p:spPr>
+              <p:txBody>
+                <a:bodyPr wrap="square" rtlCol="0">
+                  <a:spAutoFit/>
+                </a:bodyPr>
+                <a:lstStyle/>
+                <a:p>
+                  <a:pPr algn="ctr"/>
+                  <a14:m>
+                    <m:oMathPara xmlns:m="http://schemas.openxmlformats.org/officeDocument/2006/math">
+                      <m:oMathParaPr>
+                        <m:jc m:val="centerGroup"/>
+                      </m:oMathParaPr>
+                      <m:oMath xmlns:m="http://schemas.openxmlformats.org/officeDocument/2006/math">
+                        <m:r>
+                          <a:rPr lang="en-US" altLang="zh-TW" sz="2000" b="1" i="1" dirty="0">
+                            <a:latin typeface="Cambria Math" panose="02040503050406030204" pitchFamily="18" charset="0"/>
+                            <a:cs typeface="Times New Roman" panose="02020603050405020304" pitchFamily="18" charset="0"/>
+                          </a:rPr>
+                          <m:t>𝒌</m:t>
+                        </m:r>
+                        <m:r>
+                          <a:rPr lang="en-US" altLang="zh-TW" sz="2000" b="1" i="1" dirty="0">
+                            <a:latin typeface="Cambria Math" panose="02040503050406030204" pitchFamily="18" charset="0"/>
+                            <a:cs typeface="Times New Roman" panose="02020603050405020304" pitchFamily="18" charset="0"/>
+                          </a:rPr>
+                          <m:t>+</m:t>
+                        </m:r>
+                        <m:r>
+                          <a:rPr lang="en-US" altLang="zh-TW" sz="2000" b="1" i="1" dirty="0">
+                            <a:latin typeface="Cambria Math" panose="02040503050406030204" pitchFamily="18" charset="0"/>
+                            <a:cs typeface="Times New Roman" panose="02020603050405020304" pitchFamily="18" charset="0"/>
+                          </a:rPr>
+                          <m:t>𝑸</m:t>
+                        </m:r>
+                      </m:oMath>
+                    </m:oMathPara>
+                  </a14:m>
+                  <a:endParaRPr lang="zh-TW" altLang="en-US" sz="2000" b="1" dirty="0">
+                    <a:latin typeface="Times New Roman" panose="02020603050405020304" pitchFamily="18" charset="0"/>
+                    <a:cs typeface="Times New Roman" panose="02020603050405020304" pitchFamily="18" charset="0"/>
+                  </a:endParaRPr>
+                </a:p>
+              </p:txBody>
+            </p:sp>
+          </mc:Choice>
+          <mc:Fallback xmlns="">
+            <p:sp>
+              <p:nvSpPr>
+                <p:cNvPr id="33" name="文字方塊 32">
+                  <a:extLst>
+                    <a:ext uri="{FF2B5EF4-FFF2-40B4-BE49-F238E27FC236}">
+                      <a16:creationId xmlns:a16="http://schemas.microsoft.com/office/drawing/2014/main" id="{1D4615AA-66BC-426E-AA33-28132F45955C}"/>
+                    </a:ext>
+                  </a:extLst>
+                </p:cNvPr>
+                <p:cNvSpPr txBox="1">
+                  <a:spLocks noRot="1" noChangeAspect="1" noMove="1" noResize="1" noEditPoints="1" noAdjustHandles="1" noChangeArrowheads="1" noChangeShapeType="1" noTextEdit="1"/>
+                </p:cNvSpPr>
+                <p:nvPr/>
+              </p:nvSpPr>
+              <p:spPr>
+                <a:xfrm>
+                  <a:off x="1983257" y="2895776"/>
+                  <a:ext cx="842485" cy="400110"/>
+                </a:xfrm>
+                <a:prstGeom prst="rect">
+                  <a:avLst/>
+                </a:prstGeom>
+                <a:blipFill>
+                  <a:blip r:embed="rId14"/>
+                  <a:stretch>
+                    <a:fillRect l="-2878" b="-12121"/>
+                  </a:stretch>
+                </a:blipFill>
+              </p:spPr>
+              <p:txBody>
+                <a:bodyPr/>
+                <a:lstStyle/>
+                <a:p>
+                  <a:r>
+                    <a:rPr lang="zh-TW" altLang="en-US">
+                      <a:noFill/>
+                    </a:rPr>
+                    <a:t> </a:t>
+                  </a:r>
+                </a:p>
+              </p:txBody>
+            </p:sp>
+          </mc:Fallback>
+        </mc:AlternateContent>
+        <p:pic>
+          <p:nvPicPr>
+            <p:cNvPr id="34" name="Picture 2" descr="https://www.mdpi.com/applsci/applsci-08-01157/article_deploy/html/images/applsci-08-01157-g001.png">
+              <a:extLst>
+                <a:ext uri="{FF2B5EF4-FFF2-40B4-BE49-F238E27FC236}">
+                  <a16:creationId xmlns:a16="http://schemas.microsoft.com/office/drawing/2014/main" id="{1BEC7784-338A-4E10-AF2D-7B97E68D029E}"/>
+                </a:ext>
+              </a:extLst>
+            </p:cNvPr>
+            <p:cNvPicPr>
+              <a:picLocks noChangeAspect="1" noChangeArrowheads="1"/>
+            </p:cNvPicPr>
+            <p:nvPr/>
+          </p:nvPicPr>
+          <p:blipFill rotWithShape="1">
+            <a:blip r:embed="rId7">
+              <a:extLst>
+                <a:ext uri="{28A0092B-C50C-407E-A947-70E740481C1C}">
+                  <a14:useLocalDpi xmlns:a14="http://schemas.microsoft.com/office/drawing/2010/main" val="0"/>
+                </a:ext>
+              </a:extLst>
+            </a:blip>
+            <a:srcRect l="13947" t="44380" r="72508" b="47528"/>
+            <a:stretch/>
+          </p:blipFill>
+          <p:spPr bwMode="auto">
+            <a:xfrm>
+              <a:off x="4373001" y="1541862"/>
+              <a:ext cx="911788" cy="305427"/>
+            </a:xfrm>
+            <a:prstGeom prst="rect">
+              <a:avLst/>
+            </a:prstGeom>
+            <a:noFill/>
+            <a:extLst>
+              <a:ext uri="{909E8E84-426E-40DD-AFC4-6F175D3DCCD1}">
+                <a14:hiddenFill xmlns:a14="http://schemas.microsoft.com/office/drawing/2010/main">
+                  <a:solidFill>
+                    <a:srgbClr val="FFFFFF"/>
+                  </a:solidFill>
+                </a14:hiddenFill>
+              </a:ext>
+            </a:extLst>
+          </p:spPr>
+        </p:pic>
+        <p:pic>
+          <p:nvPicPr>
+            <p:cNvPr id="35" name="Picture 2" descr="https://www.mdpi.com/applsci/applsci-08-01157/article_deploy/html/images/applsci-08-01157-g001.png">
+              <a:extLst>
+                <a:ext uri="{FF2B5EF4-FFF2-40B4-BE49-F238E27FC236}">
+                  <a16:creationId xmlns:a16="http://schemas.microsoft.com/office/drawing/2014/main" id="{B9DDE247-A4D1-480B-A7EE-E8ADCE06F887}"/>
+                </a:ext>
+              </a:extLst>
+            </p:cNvPr>
+            <p:cNvPicPr>
+              <a:picLocks noChangeAspect="1" noChangeArrowheads="1"/>
+            </p:cNvPicPr>
+            <p:nvPr/>
+          </p:nvPicPr>
+          <p:blipFill rotWithShape="1">
+            <a:blip r:embed="rId7">
+              <a:extLst>
+                <a:ext uri="{28A0092B-C50C-407E-A947-70E740481C1C}">
+                  <a14:useLocalDpi xmlns:a14="http://schemas.microsoft.com/office/drawing/2010/main" val="0"/>
+                </a:ext>
+              </a:extLst>
+            </a:blip>
+            <a:srcRect l="8003" t="44892" r="72508" b="47528"/>
+            <a:stretch/>
+          </p:blipFill>
+          <p:spPr bwMode="auto">
+            <a:xfrm>
+              <a:off x="5271594" y="1561631"/>
+              <a:ext cx="1311903" cy="286113"/>
+            </a:xfrm>
+            <a:prstGeom prst="rect">
+              <a:avLst/>
+            </a:prstGeom>
+            <a:noFill/>
+            <a:extLst>
+              <a:ext uri="{909E8E84-426E-40DD-AFC4-6F175D3DCCD1}">
+                <a14:hiddenFill xmlns:a14="http://schemas.microsoft.com/office/drawing/2010/main">
+                  <a:solidFill>
+                    <a:srgbClr val="FFFFFF"/>
+                  </a:solidFill>
+                </a14:hiddenFill>
+              </a:ext>
+            </a:extLst>
+          </p:spPr>
+        </p:pic>
+        <p:sp>
+          <p:nvSpPr>
+            <p:cNvPr id="36" name="橢圓 35">
+              <a:extLst>
+                <a:ext uri="{FF2B5EF4-FFF2-40B4-BE49-F238E27FC236}">
+                  <a16:creationId xmlns:a16="http://schemas.microsoft.com/office/drawing/2014/main" id="{61C32B6E-74F3-4D31-B75B-9CABCF4A1AF7}"/>
+                </a:ext>
+              </a:extLst>
+            </p:cNvPr>
+            <p:cNvSpPr/>
+            <p:nvPr/>
+          </p:nvSpPr>
+          <p:spPr>
+            <a:xfrm rot="5400000">
+              <a:off x="9050880" y="1329622"/>
+              <a:ext cx="254044" cy="764737"/>
+            </a:xfrm>
+            <a:prstGeom prst="ellipse">
+              <a:avLst/>
+            </a:prstGeom>
+            <a:ln/>
+          </p:spPr>
+          <p:style>
+            <a:lnRef idx="0">
+              <a:schemeClr val="accent3"/>
+            </a:lnRef>
+            <a:fillRef idx="3">
+              <a:schemeClr val="accent3"/>
+            </a:fillRef>
+            <a:effectRef idx="3">
+              <a:schemeClr val="accent3"/>
+            </a:effectRef>
+            <a:fontRef idx="minor">
+              <a:schemeClr val="lt1"/>
+            </a:fontRef>
+          </p:style>
+          <p:txBody>
+            <a:bodyPr rot="0" spcFirstLastPara="0" vertOverflow="overflow" horzOverflow="overflow" vert="horz" wrap="square" lIns="71907" tIns="35956" rIns="71907" bIns="35956" numCol="1" spcCol="0" rtlCol="0" fromWordArt="0" anchor="ctr" anchorCtr="0" forceAA="0" compatLnSpc="1">
+              <a:prstTxWarp prst="textNoShape">
+                <a:avLst/>
+              </a:prstTxWarp>
+              <a:noAutofit/>
+            </a:bodyPr>
+            <a:lstStyle/>
+            <a:p>
+              <a:pPr algn="ctr"/>
+              <a:endParaRPr lang="zh-TW" altLang="en-US" sz="2000" dirty="0">
+                <a:latin typeface="Times New Roman" panose="02020603050405020304" pitchFamily="18" charset="0"/>
+                <a:cs typeface="Times New Roman" panose="02020603050405020304" pitchFamily="18" charset="0"/>
+              </a:endParaRPr>
+            </a:p>
+          </p:txBody>
+        </p:sp>
+        <p:sp>
+          <p:nvSpPr>
+            <p:cNvPr id="38" name="橢圓 37">
+              <a:extLst>
+                <a:ext uri="{FF2B5EF4-FFF2-40B4-BE49-F238E27FC236}">
+                  <a16:creationId xmlns:a16="http://schemas.microsoft.com/office/drawing/2014/main" id="{A3403E28-8733-44B6-AF23-67875A714182}"/>
+                </a:ext>
+              </a:extLst>
+            </p:cNvPr>
+            <p:cNvSpPr/>
+            <p:nvPr/>
+          </p:nvSpPr>
+          <p:spPr>
+            <a:xfrm>
+              <a:off x="9285258" y="1623334"/>
+              <a:ext cx="179337" cy="179336"/>
+            </a:xfrm>
+            <a:prstGeom prst="ellipse">
+              <a:avLst/>
+            </a:prstGeom>
+            <a:solidFill>
+              <a:schemeClr val="bg1"/>
+            </a:solidFill>
+            <a:ln>
+              <a:solidFill>
+                <a:schemeClr val="tx1"/>
+              </a:solidFill>
+            </a:ln>
+          </p:spPr>
+          <p:style>
+            <a:lnRef idx="2">
+              <a:schemeClr val="accent1">
+                <a:shade val="50000"/>
+              </a:schemeClr>
+            </a:lnRef>
+            <a:fillRef idx="1">
+              <a:schemeClr val="accent1"/>
+            </a:fillRef>
+            <a:effectRef idx="0">
+              <a:schemeClr val="accent1"/>
+            </a:effectRef>
+            <a:fontRef idx="minor">
+              <a:schemeClr val="lt1"/>
+            </a:fontRef>
+          </p:style>
+          <p:txBody>
+            <a:bodyPr rtlCol="0" anchor="ctr"/>
+            <a:lstStyle/>
+            <a:p>
+              <a:pPr algn="ctr"/>
+              <a:endParaRPr lang="zh-TW" altLang="en-US" sz="2000" dirty="0">
+                <a:latin typeface="Times New Roman" panose="02020603050405020304" pitchFamily="18" charset="0"/>
+                <a:cs typeface="Times New Roman" panose="02020603050405020304" pitchFamily="18" charset="0"/>
+              </a:endParaRPr>
+            </a:p>
+          </p:txBody>
+        </p:sp>
+        <p:sp>
+          <p:nvSpPr>
+            <p:cNvPr id="41" name="橢圓 40">
+              <a:extLst>
+                <a:ext uri="{FF2B5EF4-FFF2-40B4-BE49-F238E27FC236}">
+                  <a16:creationId xmlns:a16="http://schemas.microsoft.com/office/drawing/2014/main" id="{0F0422F1-73C2-4914-A11A-685C9A017597}"/>
+                </a:ext>
+              </a:extLst>
+            </p:cNvPr>
+            <p:cNvSpPr/>
+            <p:nvPr/>
+          </p:nvSpPr>
+          <p:spPr>
+            <a:xfrm>
+              <a:off x="8864266" y="1626412"/>
+              <a:ext cx="179337" cy="179335"/>
+            </a:xfrm>
+            <a:prstGeom prst="ellipse">
+              <a:avLst/>
+            </a:prstGeom>
+            <a:solidFill>
+              <a:schemeClr val="tx1"/>
+            </a:solidFill>
+            <a:ln>
+              <a:solidFill>
+                <a:schemeClr val="tx1"/>
+              </a:solidFill>
+            </a:ln>
+          </p:spPr>
+          <p:style>
+            <a:lnRef idx="2">
+              <a:schemeClr val="accent1">
+                <a:shade val="50000"/>
+              </a:schemeClr>
+            </a:lnRef>
+            <a:fillRef idx="1">
+              <a:schemeClr val="accent1"/>
+            </a:fillRef>
+            <a:effectRef idx="0">
+              <a:schemeClr val="accent1"/>
+            </a:effectRef>
+            <a:fontRef idx="minor">
+              <a:schemeClr val="lt1"/>
+            </a:fontRef>
+          </p:style>
+          <p:txBody>
+            <a:bodyPr rtlCol="0" anchor="ctr"/>
+            <a:lstStyle/>
+            <a:p>
+              <a:pPr algn="ctr"/>
+              <a:endParaRPr lang="zh-TW" altLang="en-US" sz="2000" dirty="0">
+                <a:latin typeface="Times New Roman" panose="02020603050405020304" pitchFamily="18" charset="0"/>
+                <a:cs typeface="Times New Roman" panose="02020603050405020304" pitchFamily="18" charset="0"/>
+              </a:endParaRPr>
+            </a:p>
+          </p:txBody>
+        </p:sp>
+        <p:sp>
+          <p:nvSpPr>
+            <p:cNvPr id="44" name="橢圓 43">
+              <a:extLst>
+                <a:ext uri="{FF2B5EF4-FFF2-40B4-BE49-F238E27FC236}">
+                  <a16:creationId xmlns:a16="http://schemas.microsoft.com/office/drawing/2014/main" id="{9A28CD47-15CD-4864-97E7-7BBB95D7F80B}"/>
+                </a:ext>
+              </a:extLst>
+            </p:cNvPr>
+            <p:cNvSpPr/>
+            <p:nvPr/>
+          </p:nvSpPr>
+          <p:spPr>
+            <a:xfrm rot="5400000">
+              <a:off x="4794820" y="1301963"/>
+              <a:ext cx="254044" cy="764737"/>
+            </a:xfrm>
+            <a:prstGeom prst="ellipse">
+              <a:avLst/>
+            </a:prstGeom>
+            <a:ln/>
+          </p:spPr>
+          <p:style>
+            <a:lnRef idx="0">
+              <a:schemeClr val="accent3"/>
+            </a:lnRef>
+            <a:fillRef idx="3">
+              <a:schemeClr val="accent3"/>
+            </a:fillRef>
+            <a:effectRef idx="3">
+              <a:schemeClr val="accent3"/>
+            </a:effectRef>
+            <a:fontRef idx="minor">
+              <a:schemeClr val="lt1"/>
+            </a:fontRef>
+          </p:style>
+          <p:txBody>
+            <a:bodyPr rot="0" spcFirstLastPara="0" vertOverflow="overflow" horzOverflow="overflow" vert="horz" wrap="square" lIns="71907" tIns="35956" rIns="71907" bIns="35956" numCol="1" spcCol="0" rtlCol="0" fromWordArt="0" anchor="ctr" anchorCtr="0" forceAA="0" compatLnSpc="1">
+              <a:prstTxWarp prst="textNoShape">
+                <a:avLst/>
+              </a:prstTxWarp>
+              <a:noAutofit/>
+            </a:bodyPr>
+            <a:lstStyle/>
+            <a:p>
+              <a:pPr algn="ctr"/>
+              <a:endParaRPr lang="zh-TW" altLang="en-US" sz="2000" dirty="0">
+                <a:latin typeface="Times New Roman" panose="02020603050405020304" pitchFamily="18" charset="0"/>
+                <a:cs typeface="Times New Roman" panose="02020603050405020304" pitchFamily="18" charset="0"/>
+              </a:endParaRPr>
+            </a:p>
+          </p:txBody>
+        </p:sp>
+        <p:sp>
+          <p:nvSpPr>
+            <p:cNvPr id="46" name="橢圓 45">
+              <a:extLst>
+                <a:ext uri="{FF2B5EF4-FFF2-40B4-BE49-F238E27FC236}">
+                  <a16:creationId xmlns:a16="http://schemas.microsoft.com/office/drawing/2014/main" id="{9FBDD78B-2735-4E61-8E7C-C5E6D138E3F0}"/>
+                </a:ext>
+              </a:extLst>
+            </p:cNvPr>
+            <p:cNvSpPr/>
+            <p:nvPr/>
+          </p:nvSpPr>
+          <p:spPr>
+            <a:xfrm>
+              <a:off x="5029197" y="1595676"/>
+              <a:ext cx="179337" cy="179336"/>
+            </a:xfrm>
+            <a:prstGeom prst="ellipse">
+              <a:avLst/>
+            </a:prstGeom>
+            <a:solidFill>
+              <a:schemeClr val="bg1"/>
+            </a:solidFill>
+            <a:ln>
+              <a:solidFill>
+                <a:schemeClr val="tx1"/>
+              </a:solidFill>
+            </a:ln>
+          </p:spPr>
+          <p:style>
+            <a:lnRef idx="2">
+              <a:schemeClr val="accent1">
+                <a:shade val="50000"/>
+              </a:schemeClr>
+            </a:lnRef>
+            <a:fillRef idx="1">
+              <a:schemeClr val="accent1"/>
+            </a:fillRef>
+            <a:effectRef idx="0">
+              <a:schemeClr val="accent1"/>
+            </a:effectRef>
+            <a:fontRef idx="minor">
+              <a:schemeClr val="lt1"/>
+            </a:fontRef>
+          </p:style>
+          <p:txBody>
+            <a:bodyPr rtlCol="0" anchor="ctr"/>
+            <a:lstStyle/>
+            <a:p>
+              <a:pPr algn="ctr"/>
+              <a:endParaRPr lang="zh-TW" altLang="en-US" sz="2000" dirty="0">
+                <a:latin typeface="Times New Roman" panose="02020603050405020304" pitchFamily="18" charset="0"/>
+                <a:cs typeface="Times New Roman" panose="02020603050405020304" pitchFamily="18" charset="0"/>
+              </a:endParaRPr>
+            </a:p>
+          </p:txBody>
+        </p:sp>
+        <p:sp>
+          <p:nvSpPr>
+            <p:cNvPr id="49" name="橢圓 48">
+              <a:extLst>
+                <a:ext uri="{FF2B5EF4-FFF2-40B4-BE49-F238E27FC236}">
+                  <a16:creationId xmlns:a16="http://schemas.microsoft.com/office/drawing/2014/main" id="{A606E4AB-7C7A-4BD5-B9E4-CC9C4AF34469}"/>
+                </a:ext>
+              </a:extLst>
+            </p:cNvPr>
+            <p:cNvSpPr/>
+            <p:nvPr/>
+          </p:nvSpPr>
+          <p:spPr>
+            <a:xfrm>
+              <a:off x="4608205" y="1598755"/>
+              <a:ext cx="179337" cy="179335"/>
+            </a:xfrm>
+            <a:prstGeom prst="ellipse">
+              <a:avLst/>
+            </a:prstGeom>
+            <a:solidFill>
+              <a:schemeClr val="tx1"/>
+            </a:solidFill>
+            <a:ln>
+              <a:solidFill>
+                <a:schemeClr val="tx1"/>
+              </a:solidFill>
+            </a:ln>
+          </p:spPr>
+          <p:style>
+            <a:lnRef idx="2">
+              <a:schemeClr val="accent1">
+                <a:shade val="50000"/>
+              </a:schemeClr>
+            </a:lnRef>
+            <a:fillRef idx="1">
+              <a:schemeClr val="accent1"/>
+            </a:fillRef>
+            <a:effectRef idx="0">
+              <a:schemeClr val="accent1"/>
+            </a:effectRef>
+            <a:fontRef idx="minor">
+              <a:schemeClr val="lt1"/>
+            </a:fontRef>
+          </p:style>
+          <p:txBody>
+            <a:bodyPr rtlCol="0" anchor="ctr"/>
+            <a:lstStyle/>
+            <a:p>
+              <a:pPr algn="ctr"/>
+              <a:endParaRPr lang="zh-TW" altLang="en-US" sz="2000" dirty="0">
+                <a:latin typeface="Times New Roman" panose="02020603050405020304" pitchFamily="18" charset="0"/>
+                <a:cs typeface="Times New Roman" panose="02020603050405020304" pitchFamily="18" charset="0"/>
+              </a:endParaRPr>
+            </a:p>
+          </p:txBody>
+        </p:sp>
+        <p:pic>
+          <p:nvPicPr>
+            <p:cNvPr id="51" name="圖片 50">
+              <a:extLst>
+                <a:ext uri="{FF2B5EF4-FFF2-40B4-BE49-F238E27FC236}">
+                  <a16:creationId xmlns:a16="http://schemas.microsoft.com/office/drawing/2014/main" id="{63D12E7E-2834-4644-A173-46E1B6EBE11B}"/>
+                </a:ext>
+              </a:extLst>
+            </p:cNvPr>
+            <p:cNvPicPr>
+              <a:picLocks noChangeAspect="1"/>
+            </p:cNvPicPr>
+            <p:nvPr/>
+          </p:nvPicPr>
+          <p:blipFill rotWithShape="1">
+            <a:blip r:embed="rId6"/>
+            <a:srcRect l="7872" t="40135" r="7992" b="-2"/>
+            <a:stretch/>
+          </p:blipFill>
+          <p:spPr>
+            <a:xfrm rot="10800000">
+              <a:off x="904100" y="2167966"/>
+              <a:ext cx="2079972" cy="602117"/>
+            </a:xfrm>
+            <a:prstGeom prst="rect">
+              <a:avLst/>
+            </a:prstGeom>
+          </p:spPr>
+        </p:pic>
+        <p:grpSp>
+          <p:nvGrpSpPr>
+            <p:cNvPr id="52" name="群組 51">
+              <a:extLst>
+                <a:ext uri="{FF2B5EF4-FFF2-40B4-BE49-F238E27FC236}">
+                  <a16:creationId xmlns:a16="http://schemas.microsoft.com/office/drawing/2014/main" id="{BBC122BA-D29A-4AD5-8220-E322FEC38F9D}"/>
+                </a:ext>
+              </a:extLst>
+            </p:cNvPr>
+            <p:cNvGrpSpPr/>
+            <p:nvPr/>
+          </p:nvGrpSpPr>
+          <p:grpSpPr>
+            <a:xfrm>
+              <a:off x="1558803" y="2051845"/>
+              <a:ext cx="435198" cy="353943"/>
+              <a:chOff x="8959" y="4723486"/>
+              <a:chExt cx="801265" cy="651664"/>
+            </a:xfrm>
+          </p:grpSpPr>
+          <p:sp>
+            <p:nvSpPr>
+              <p:cNvPr id="53" name="橢圓 52">
+                <a:extLst>
+                  <a:ext uri="{FF2B5EF4-FFF2-40B4-BE49-F238E27FC236}">
+                    <a16:creationId xmlns:a16="http://schemas.microsoft.com/office/drawing/2014/main" id="{B3EAD4BB-AB27-48C6-B976-D5B6FD58AE05}"/>
+                  </a:ext>
+                </a:extLst>
+              </p:cNvPr>
+              <p:cNvSpPr/>
+              <p:nvPr/>
+            </p:nvSpPr>
+            <p:spPr>
+              <a:xfrm>
+                <a:off x="58493" y="4762060"/>
+                <a:ext cx="530251" cy="530253"/>
+              </a:xfrm>
+              <a:prstGeom prst="ellipse">
+                <a:avLst/>
+              </a:prstGeom>
+              <a:solidFill>
+                <a:schemeClr val="bg1"/>
+              </a:solidFill>
+              <a:ln>
+                <a:solidFill>
+                  <a:schemeClr val="tx1"/>
+                </a:solidFill>
+              </a:ln>
+            </p:spPr>
+            <p:style>
+              <a:lnRef idx="2">
+                <a:schemeClr val="accent1">
+                  <a:shade val="50000"/>
+                </a:schemeClr>
+              </a:lnRef>
+              <a:fillRef idx="1">
+                <a:schemeClr val="accent1"/>
+              </a:fillRef>
+              <a:effectRef idx="0">
+                <a:schemeClr val="accent1"/>
+              </a:effectRef>
+              <a:fontRef idx="minor">
+                <a:schemeClr val="lt1"/>
+              </a:fontRef>
+            </p:style>
+            <p:txBody>
+              <a:bodyPr rtlCol="0" anchor="ctr"/>
+              <a:lstStyle/>
+              <a:p>
+                <a:pPr algn="ctr"/>
+                <a:endParaRPr lang="zh-TW" altLang="en-US" sz="1700" dirty="0">
+                  <a:latin typeface="Times New Roman" panose="02020603050405020304" pitchFamily="18" charset="0"/>
+                  <a:cs typeface="Times New Roman" panose="02020603050405020304" pitchFamily="18" charset="0"/>
+                </a:endParaRPr>
+              </a:p>
+            </p:txBody>
+          </p:sp>
+          <mc:AlternateContent xmlns:mc="http://schemas.openxmlformats.org/markup-compatibility/2006" xmlns:a14="http://schemas.microsoft.com/office/drawing/2010/main">
+            <mc:Choice Requires="a14">
+              <p:sp>
+                <p:nvSpPr>
+                  <p:cNvPr id="54" name="文字方塊 53">
+                    <a:extLst>
+                      <a:ext uri="{FF2B5EF4-FFF2-40B4-BE49-F238E27FC236}">
+                        <a16:creationId xmlns:a16="http://schemas.microsoft.com/office/drawing/2014/main" id="{A00FD529-B0C9-418E-9E58-547D38F4292B}"/>
+                      </a:ext>
+                    </a:extLst>
+                  </p:cNvPr>
+                  <p:cNvSpPr txBox="1"/>
+                  <p:nvPr/>
+                </p:nvSpPr>
+                <p:spPr>
+                  <a:xfrm>
+                    <a:off x="8959" y="4723486"/>
+                    <a:ext cx="801265" cy="651664"/>
+                  </a:xfrm>
+                  <a:prstGeom prst="rect">
+                    <a:avLst/>
+                  </a:prstGeom>
+                  <a:noFill/>
+                </p:spPr>
+                <p:txBody>
+                  <a:bodyPr wrap="square" rtlCol="0">
+                    <a:spAutoFit/>
+                  </a:bodyPr>
+                  <a:lstStyle/>
+                  <a:p>
+                    <a:pPr algn="ctr"/>
+                    <a14:m>
+                      <m:oMathPara xmlns:m="http://schemas.openxmlformats.org/officeDocument/2006/math">
+                        <m:oMathParaPr>
+                          <m:jc m:val="centerGroup"/>
+                        </m:oMathParaPr>
+                        <m:oMath xmlns:m="http://schemas.openxmlformats.org/officeDocument/2006/math">
+                          <m:sSup>
+                            <m:sSupPr>
+                              <m:ctrlPr>
+                                <a:rPr lang="en-US" altLang="zh-TW" sz="1700" b="1" i="1" dirty="0">
+                                  <a:latin typeface="Cambria Math" panose="02040503050406030204" pitchFamily="18" charset="0"/>
+                                  <a:cs typeface="Times New Roman" panose="02020603050405020304" pitchFamily="18" charset="0"/>
+                                </a:rPr>
+                              </m:ctrlPr>
+                            </m:sSupPr>
+                            <m:e>
+                              <m:r>
+                                <a:rPr lang="en-US" altLang="zh-TW" sz="1700" b="1" i="1" dirty="0">
+                                  <a:latin typeface="Cambria Math" panose="02040503050406030204" pitchFamily="18" charset="0"/>
+                                  <a:cs typeface="Times New Roman" panose="02020603050405020304" pitchFamily="18" charset="0"/>
+                                </a:rPr>
+                                <m:t>𝒉</m:t>
+                              </m:r>
+                            </m:e>
+                            <m:sup>
+                              <m:r>
+                                <a:rPr lang="en-US" altLang="zh-TW" sz="1700" b="1" i="1" dirty="0">
+                                  <a:latin typeface="Cambria Math" panose="02040503050406030204" pitchFamily="18" charset="0"/>
+                                  <a:cs typeface="Times New Roman" panose="02020603050405020304" pitchFamily="18" charset="0"/>
+                                </a:rPr>
+                                <m:t>+</m:t>
+                              </m:r>
+                            </m:sup>
+                          </m:sSup>
+                        </m:oMath>
+                      </m:oMathPara>
+                    </a14:m>
+                    <a:endParaRPr lang="zh-TW" altLang="en-US" sz="1700" b="1" dirty="0">
+                      <a:latin typeface="Times New Roman" panose="02020603050405020304" pitchFamily="18" charset="0"/>
+                      <a:cs typeface="Times New Roman" panose="02020603050405020304" pitchFamily="18" charset="0"/>
+                    </a:endParaRPr>
+                  </a:p>
+                </p:txBody>
+              </p:sp>
+            </mc:Choice>
+            <mc:Fallback xmlns="">
+              <p:sp>
+                <p:nvSpPr>
+                  <p:cNvPr id="54" name="文字方塊 53">
+                    <a:extLst>
+                      <a:ext uri="{FF2B5EF4-FFF2-40B4-BE49-F238E27FC236}">
+                        <a16:creationId xmlns:a16="http://schemas.microsoft.com/office/drawing/2014/main" id="{A00FD529-B0C9-418E-9E58-547D38F4292B}"/>
+                      </a:ext>
+                    </a:extLst>
+                  </p:cNvPr>
+                  <p:cNvSpPr txBox="1">
+                    <a:spLocks noRot="1" noChangeAspect="1" noMove="1" noResize="1" noEditPoints="1" noAdjustHandles="1" noChangeArrowheads="1" noChangeShapeType="1" noTextEdit="1"/>
+                  </p:cNvSpPr>
+                  <p:nvPr/>
+                </p:nvSpPr>
+                <p:spPr>
+                  <a:xfrm>
+                    <a:off x="8959" y="4723486"/>
+                    <a:ext cx="801265" cy="651664"/>
+                  </a:xfrm>
+                  <a:prstGeom prst="rect">
+                    <a:avLst/>
+                  </a:prstGeom>
+                  <a:blipFill>
+                    <a:blip r:embed="rId15"/>
+                    <a:stretch>
+                      <a:fillRect l="-5634"/>
+                    </a:stretch>
+                  </a:blipFill>
+                </p:spPr>
+                <p:txBody>
+                  <a:bodyPr/>
+                  <a:lstStyle/>
+                  <a:p>
+                    <a:r>
+                      <a:rPr lang="zh-TW" altLang="en-US">
+                        <a:noFill/>
+                      </a:rPr>
+                      <a:t> </a:t>
+                    </a:r>
+                  </a:p>
+                </p:txBody>
+              </p:sp>
+            </mc:Fallback>
+          </mc:AlternateContent>
+        </p:grpSp>
+        <p:grpSp>
+          <p:nvGrpSpPr>
+            <p:cNvPr id="55" name="群組 54">
+              <a:extLst>
+                <a:ext uri="{FF2B5EF4-FFF2-40B4-BE49-F238E27FC236}">
+                  <a16:creationId xmlns:a16="http://schemas.microsoft.com/office/drawing/2014/main" id="{53190523-1652-4A5D-9751-BD4BD4336902}"/>
+                </a:ext>
+              </a:extLst>
+            </p:cNvPr>
+            <p:cNvGrpSpPr/>
+            <p:nvPr/>
+          </p:nvGrpSpPr>
+          <p:grpSpPr>
+            <a:xfrm>
+              <a:off x="2098034" y="801994"/>
+              <a:ext cx="358960" cy="353943"/>
+              <a:chOff x="1001767" y="3281295"/>
+              <a:chExt cx="660899" cy="651660"/>
+            </a:xfrm>
+          </p:grpSpPr>
+          <p:sp>
+            <p:nvSpPr>
+              <p:cNvPr id="56" name="橢圓 55">
+                <a:extLst>
+                  <a:ext uri="{FF2B5EF4-FFF2-40B4-BE49-F238E27FC236}">
+                    <a16:creationId xmlns:a16="http://schemas.microsoft.com/office/drawing/2014/main" id="{3EEB7D1E-69DE-4954-9CDE-8BF27D2951E8}"/>
+                  </a:ext>
+                </a:extLst>
+              </p:cNvPr>
+              <p:cNvSpPr/>
+              <p:nvPr/>
+            </p:nvSpPr>
+            <p:spPr>
+              <a:xfrm>
+                <a:off x="1001767" y="3349559"/>
+                <a:ext cx="530251" cy="530250"/>
+              </a:xfrm>
+              <a:prstGeom prst="ellipse">
+                <a:avLst/>
+              </a:prstGeom>
+              <a:solidFill>
+                <a:schemeClr val="tx1"/>
+              </a:solidFill>
+              <a:ln>
+                <a:solidFill>
+                  <a:schemeClr val="tx1"/>
+                </a:solidFill>
+              </a:ln>
+            </p:spPr>
+            <p:style>
+              <a:lnRef idx="2">
+                <a:schemeClr val="accent1">
+                  <a:shade val="50000"/>
+                </a:schemeClr>
+              </a:lnRef>
+              <a:fillRef idx="1">
+                <a:schemeClr val="accent1"/>
+              </a:fillRef>
+              <a:effectRef idx="0">
+                <a:schemeClr val="accent1"/>
+              </a:effectRef>
+              <a:fontRef idx="minor">
+                <a:schemeClr val="lt1"/>
+              </a:fontRef>
+            </p:style>
+            <p:txBody>
+              <a:bodyPr rtlCol="0" anchor="ctr"/>
+              <a:lstStyle/>
+              <a:p>
+                <a:pPr algn="ctr"/>
+                <a:endParaRPr lang="zh-TW" altLang="en-US" sz="1700" dirty="0">
+                  <a:latin typeface="Times New Roman" panose="02020603050405020304" pitchFamily="18" charset="0"/>
+                  <a:cs typeface="Times New Roman" panose="02020603050405020304" pitchFamily="18" charset="0"/>
+                </a:endParaRPr>
+              </a:p>
+            </p:txBody>
+          </p:sp>
+          <mc:AlternateContent xmlns:mc="http://schemas.openxmlformats.org/markup-compatibility/2006" xmlns:a14="http://schemas.microsoft.com/office/drawing/2010/main">
+            <mc:Choice Requires="a14">
+              <p:sp>
+                <p:nvSpPr>
+                  <p:cNvPr id="57" name="文字方塊 56">
+                    <a:extLst>
+                      <a:ext uri="{FF2B5EF4-FFF2-40B4-BE49-F238E27FC236}">
+                        <a16:creationId xmlns:a16="http://schemas.microsoft.com/office/drawing/2014/main" id="{C05937B5-24D7-4C0B-BDCF-119AEB629151}"/>
+                      </a:ext>
+                    </a:extLst>
+                  </p:cNvPr>
+                  <p:cNvSpPr txBox="1"/>
+                  <p:nvPr/>
+                </p:nvSpPr>
+                <p:spPr>
+                  <a:xfrm>
+                    <a:off x="1012217" y="3281295"/>
+                    <a:ext cx="650449" cy="651660"/>
+                  </a:xfrm>
+                  <a:prstGeom prst="rect">
+                    <a:avLst/>
+                  </a:prstGeom>
+                  <a:noFill/>
+                </p:spPr>
+                <p:txBody>
+                  <a:bodyPr wrap="square" rtlCol="0">
+                    <a:spAutoFit/>
+                  </a:bodyPr>
+                  <a:lstStyle/>
+                  <a:p>
+                    <a:pPr algn="ctr"/>
+                    <a14:m>
+                      <m:oMathPara xmlns:m="http://schemas.openxmlformats.org/officeDocument/2006/math">
+                        <m:oMathParaPr>
+                          <m:jc m:val="centerGroup"/>
+                        </m:oMathParaPr>
+                        <m:oMath xmlns:m="http://schemas.openxmlformats.org/officeDocument/2006/math">
+                          <m:sSup>
+                            <m:sSupPr>
+                              <m:ctrlPr>
+                                <a:rPr lang="en-US" altLang="zh-TW" sz="1700" b="1" i="1" dirty="0">
+                                  <a:solidFill>
+                                    <a:schemeClr val="bg1"/>
+                                  </a:solidFill>
+                                  <a:latin typeface="Cambria Math" panose="02040503050406030204" pitchFamily="18" charset="0"/>
+                                  <a:cs typeface="Times New Roman" panose="02020603050405020304" pitchFamily="18" charset="0"/>
+                                </a:rPr>
+                              </m:ctrlPr>
+                            </m:sSupPr>
+                            <m:e>
+                              <m:r>
+                                <a:rPr lang="en-US" altLang="zh-TW" sz="1700" b="1" i="1" dirty="0">
+                                  <a:solidFill>
+                                    <a:schemeClr val="bg1"/>
+                                  </a:solidFill>
+                                  <a:latin typeface="Cambria Math" panose="02040503050406030204" pitchFamily="18" charset="0"/>
+                                  <a:cs typeface="Times New Roman" panose="02020603050405020304" pitchFamily="18" charset="0"/>
+                                </a:rPr>
+                                <m:t>𝒆</m:t>
+                              </m:r>
+                            </m:e>
+                            <m:sup>
+                              <m:r>
+                                <a:rPr lang="en-US" altLang="zh-TW" sz="1700" b="1" i="1" dirty="0">
+                                  <a:solidFill>
+                                    <a:schemeClr val="bg1"/>
+                                  </a:solidFill>
+                                  <a:latin typeface="Cambria Math" panose="02040503050406030204" pitchFamily="18" charset="0"/>
+                                  <a:cs typeface="Times New Roman" panose="02020603050405020304" pitchFamily="18" charset="0"/>
+                                </a:rPr>
+                                <m:t>−</m:t>
+                              </m:r>
+                            </m:sup>
+                          </m:sSup>
+                        </m:oMath>
+                      </m:oMathPara>
+                    </a14:m>
+                    <a:endParaRPr lang="zh-TW" altLang="en-US" sz="1700" b="1" dirty="0">
+                      <a:solidFill>
+                        <a:schemeClr val="bg1"/>
+                      </a:solidFill>
+                      <a:latin typeface="Times New Roman" panose="02020603050405020304" pitchFamily="18" charset="0"/>
+                      <a:cs typeface="Times New Roman" panose="02020603050405020304" pitchFamily="18" charset="0"/>
+                    </a:endParaRPr>
+                  </a:p>
+                </p:txBody>
+              </p:sp>
+            </mc:Choice>
+            <mc:Fallback xmlns="">
+              <p:sp>
+                <p:nvSpPr>
+                  <p:cNvPr id="57" name="文字方塊 56">
+                    <a:extLst>
+                      <a:ext uri="{FF2B5EF4-FFF2-40B4-BE49-F238E27FC236}">
+                        <a16:creationId xmlns:a16="http://schemas.microsoft.com/office/drawing/2014/main" id="{C05937B5-24D7-4C0B-BDCF-119AEB629151}"/>
+                      </a:ext>
+                    </a:extLst>
+                  </p:cNvPr>
+                  <p:cNvSpPr txBox="1">
+                    <a:spLocks noRot="1" noChangeAspect="1" noMove="1" noResize="1" noEditPoints="1" noAdjustHandles="1" noChangeArrowheads="1" noChangeShapeType="1" noTextEdit="1"/>
+                  </p:cNvSpPr>
+                  <p:nvPr/>
+                </p:nvSpPr>
+                <p:spPr>
+                  <a:xfrm>
+                    <a:off x="1012217" y="3281295"/>
+                    <a:ext cx="650449" cy="651660"/>
+                  </a:xfrm>
+                  <a:prstGeom prst="rect">
+                    <a:avLst/>
+                  </a:prstGeom>
+                  <a:blipFill>
+                    <a:blip r:embed="rId16"/>
+                    <a:stretch>
+                      <a:fillRect l="-6897"/>
+                    </a:stretch>
+                  </a:blipFill>
+                </p:spPr>
+                <p:txBody>
+                  <a:bodyPr/>
+                  <a:lstStyle/>
+                  <a:p>
+                    <a:r>
+                      <a:rPr lang="zh-TW" altLang="en-US">
+                        <a:noFill/>
+                      </a:rPr>
+                      <a:t> </a:t>
+                    </a:r>
+                  </a:p>
+                </p:txBody>
+              </p:sp>
+            </mc:Fallback>
+          </mc:AlternateContent>
+        </p:grpSp>
+        <p:grpSp>
+          <p:nvGrpSpPr>
+            <p:cNvPr id="58" name="群組 57">
+              <a:extLst>
+                <a:ext uri="{FF2B5EF4-FFF2-40B4-BE49-F238E27FC236}">
+                  <a16:creationId xmlns:a16="http://schemas.microsoft.com/office/drawing/2014/main" id="{C3A16C75-00A5-4984-82E1-BB6A00A61C0C}"/>
+                </a:ext>
+              </a:extLst>
+            </p:cNvPr>
+            <p:cNvGrpSpPr/>
+            <p:nvPr/>
+          </p:nvGrpSpPr>
+          <p:grpSpPr>
+            <a:xfrm rot="1283681">
+              <a:off x="337909" y="1276127"/>
+              <a:ext cx="1672922" cy="233308"/>
+              <a:chOff x="2343150" y="3428999"/>
+              <a:chExt cx="9719212" cy="1926504"/>
+            </a:xfrm>
+          </p:grpSpPr>
+          <p:pic>
+            <p:nvPicPr>
+              <p:cNvPr id="59" name="圖片 58">
+                <a:extLst>
+                  <a:ext uri="{FF2B5EF4-FFF2-40B4-BE49-F238E27FC236}">
+                    <a16:creationId xmlns:a16="http://schemas.microsoft.com/office/drawing/2014/main" id="{F7B8113F-7722-469F-B5C4-DE953A009B53}"/>
+                  </a:ext>
+                </a:extLst>
+              </p:cNvPr>
+              <p:cNvPicPr>
+                <a:picLocks noChangeAspect="1"/>
+              </p:cNvPicPr>
+              <p:nvPr/>
+            </p:nvPicPr>
+            <p:blipFill rotWithShape="1">
+              <a:blip r:embed="rId17">
+                <a:duotone>
+                  <a:schemeClr val="accent4">
+                    <a:shade val="45000"/>
+                    <a:satMod val="135000"/>
+                  </a:schemeClr>
+                  <a:prstClr val="white"/>
+                </a:duotone>
+              </a:blip>
+              <a:srcRect l="12724" r="56552"/>
+              <a:stretch/>
+            </p:blipFill>
+            <p:spPr>
+              <a:xfrm>
+                <a:off x="4352925" y="3428999"/>
+                <a:ext cx="2009775" cy="1926503"/>
+              </a:xfrm>
+              <a:prstGeom prst="rect">
+                <a:avLst/>
+              </a:prstGeom>
+            </p:spPr>
+          </p:pic>
+          <p:pic>
+            <p:nvPicPr>
+              <p:cNvPr id="60" name="圖片 59">
+                <a:extLst>
+                  <a:ext uri="{FF2B5EF4-FFF2-40B4-BE49-F238E27FC236}">
+                    <a16:creationId xmlns:a16="http://schemas.microsoft.com/office/drawing/2014/main" id="{37F447C1-819C-425F-AF30-972A9CA1002C}"/>
+                  </a:ext>
+                </a:extLst>
+              </p:cNvPr>
+              <p:cNvPicPr>
+                <a:picLocks noChangeAspect="1"/>
+              </p:cNvPicPr>
+              <p:nvPr/>
+            </p:nvPicPr>
+            <p:blipFill rotWithShape="1">
+              <a:blip r:embed="rId17">
+                <a:duotone>
+                  <a:schemeClr val="accent4">
+                    <a:shade val="45000"/>
+                    <a:satMod val="135000"/>
+                  </a:schemeClr>
+                  <a:prstClr val="white"/>
+                </a:duotone>
+              </a:blip>
+              <a:srcRect l="12870"/>
+              <a:stretch/>
+            </p:blipFill>
+            <p:spPr>
+              <a:xfrm>
+                <a:off x="6362700" y="3429000"/>
+                <a:ext cx="5699662" cy="1926503"/>
+              </a:xfrm>
+              <a:prstGeom prst="rect">
+                <a:avLst/>
+              </a:prstGeom>
+            </p:spPr>
+          </p:pic>
+          <p:pic>
+            <p:nvPicPr>
+              <p:cNvPr id="61" name="圖片 60">
+                <a:extLst>
+                  <a:ext uri="{FF2B5EF4-FFF2-40B4-BE49-F238E27FC236}">
+                    <a16:creationId xmlns:a16="http://schemas.microsoft.com/office/drawing/2014/main" id="{5B4FCA4E-EA7B-42B4-B781-DED1546BA946}"/>
+                  </a:ext>
+                </a:extLst>
+              </p:cNvPr>
+              <p:cNvPicPr>
+                <a:picLocks noChangeAspect="1"/>
+              </p:cNvPicPr>
+              <p:nvPr/>
+            </p:nvPicPr>
+            <p:blipFill rotWithShape="1">
+              <a:blip r:embed="rId17">
+                <a:duotone>
+                  <a:schemeClr val="accent4">
+                    <a:shade val="45000"/>
+                    <a:satMod val="135000"/>
+                  </a:schemeClr>
+                  <a:prstClr val="white"/>
+                </a:duotone>
+              </a:blip>
+              <a:srcRect l="12724" r="56552"/>
+              <a:stretch/>
+            </p:blipFill>
+            <p:spPr>
+              <a:xfrm>
+                <a:off x="2343150" y="3428999"/>
+                <a:ext cx="2009775" cy="1926503"/>
+              </a:xfrm>
+              <a:prstGeom prst="rect">
+                <a:avLst/>
+              </a:prstGeom>
+            </p:spPr>
+          </p:pic>
+        </p:grpSp>
+        <p:sp>
+          <p:nvSpPr>
+            <p:cNvPr id="63" name="文字方塊 62">
+              <a:extLst>
+                <a:ext uri="{FF2B5EF4-FFF2-40B4-BE49-F238E27FC236}">
+                  <a16:creationId xmlns:a16="http://schemas.microsoft.com/office/drawing/2014/main" id="{31B03023-6F55-4EE5-A89E-B2D2085BE042}"/>
+                </a:ext>
+              </a:extLst>
+            </p:cNvPr>
+            <p:cNvSpPr txBox="1"/>
+            <p:nvPr/>
+          </p:nvSpPr>
+          <p:spPr>
+            <a:xfrm>
+              <a:off x="-110676" y="2687387"/>
+              <a:ext cx="1716428" cy="707886"/>
+            </a:xfrm>
+            <a:prstGeom prst="rect">
+              <a:avLst/>
+            </a:prstGeom>
+            <a:noFill/>
+          </p:spPr>
+          <p:txBody>
+            <a:bodyPr wrap="square" rtlCol="0">
+              <a:spAutoFit/>
+            </a:bodyPr>
+            <a:lstStyle/>
+            <a:p>
+              <a:pPr algn="ctr"/>
+              <a:r>
+                <a:rPr lang="en-US" altLang="zh-TW" sz="2000" dirty="0">
+                  <a:latin typeface="Times New Roman" panose="02020603050405020304" pitchFamily="18" charset="0"/>
+                  <a:cs typeface="Times New Roman" panose="02020603050405020304" pitchFamily="18" charset="0"/>
+                </a:rPr>
+                <a:t>Momentum</a:t>
+              </a:r>
+              <a:r>
+                <a:rPr lang="zh-TW" altLang="en-US" sz="2000" dirty="0">
+                  <a:latin typeface="Times New Roman" panose="02020603050405020304" pitchFamily="18" charset="0"/>
+                  <a:cs typeface="Times New Roman" panose="02020603050405020304" pitchFamily="18" charset="0"/>
+                </a:rPr>
+                <a:t> </a:t>
+              </a:r>
+              <a:r>
+                <a:rPr lang="en-US" altLang="zh-TW" sz="2000" dirty="0">
+                  <a:latin typeface="Times New Roman" panose="02020603050405020304" pitchFamily="18" charset="0"/>
+                  <a:cs typeface="Times New Roman" panose="02020603050405020304" pitchFamily="18" charset="0"/>
+                </a:rPr>
+                <a:t>of electron</a:t>
+              </a:r>
+              <a:endParaRPr lang="zh-TW" altLang="en-US" sz="2000" b="1" dirty="0">
+                <a:latin typeface="Times New Roman" panose="02020603050405020304" pitchFamily="18" charset="0"/>
+                <a:cs typeface="Times New Roman" panose="02020603050405020304" pitchFamily="18" charset="0"/>
+              </a:endParaRPr>
+            </a:p>
+          </p:txBody>
+        </p:sp>
+        <p:cxnSp>
+          <p:nvCxnSpPr>
+            <p:cNvPr id="64" name="直線單箭頭接點 63">
+              <a:extLst>
+                <a:ext uri="{FF2B5EF4-FFF2-40B4-BE49-F238E27FC236}">
+                  <a16:creationId xmlns:a16="http://schemas.microsoft.com/office/drawing/2014/main" id="{A81CA8FA-68CB-4339-AE67-B8E4FBEA5423}"/>
+                </a:ext>
+              </a:extLst>
+            </p:cNvPr>
+            <p:cNvCxnSpPr>
+              <a:cxnSpLocks/>
+            </p:cNvCxnSpPr>
+            <p:nvPr/>
+          </p:nvCxnSpPr>
+          <p:spPr>
+            <a:xfrm>
+              <a:off x="1504950" y="2912682"/>
+              <a:ext cx="1513840" cy="0"/>
+            </a:xfrm>
+            <a:prstGeom prst="straightConnector1">
+              <a:avLst/>
+            </a:prstGeom>
+            <a:ln>
+              <a:tailEnd type="triangle" w="lg" len="lg"/>
+            </a:ln>
+          </p:spPr>
+          <p:style>
+            <a:lnRef idx="3">
+              <a:schemeClr val="dk1"/>
+            </a:lnRef>
+            <a:fillRef idx="0">
+              <a:schemeClr val="dk1"/>
+            </a:fillRef>
+            <a:effectRef idx="2">
+              <a:schemeClr val="dk1"/>
+            </a:effectRef>
+            <a:fontRef idx="minor">
+              <a:schemeClr val="tx1"/>
+            </a:fontRef>
+          </p:style>
+        </p:cxnSp>
+        <p:sp>
+          <p:nvSpPr>
+            <p:cNvPr id="65" name="弧形 64">
+              <a:extLst>
+                <a:ext uri="{FF2B5EF4-FFF2-40B4-BE49-F238E27FC236}">
+                  <a16:creationId xmlns:a16="http://schemas.microsoft.com/office/drawing/2014/main" id="{A819A50B-6EE9-4B60-A8B3-E42816298D11}"/>
+                </a:ext>
+              </a:extLst>
+            </p:cNvPr>
+            <p:cNvSpPr/>
+            <p:nvPr/>
+          </p:nvSpPr>
+          <p:spPr>
+            <a:xfrm>
+              <a:off x="6636684" y="1272129"/>
+              <a:ext cx="474180" cy="484381"/>
+            </a:xfrm>
+            <a:prstGeom prst="arc">
+              <a:avLst>
+                <a:gd name="adj1" fmla="val 12241359"/>
+                <a:gd name="adj2" fmla="val 16234305"/>
+              </a:avLst>
+            </a:prstGeom>
+            <a:ln w="19050">
+              <a:solidFill>
+                <a:schemeClr val="tx1"/>
+              </a:solidFill>
+            </a:ln>
+          </p:spPr>
+          <p:style>
+            <a:lnRef idx="1">
+              <a:schemeClr val="accent1"/>
+            </a:lnRef>
+            <a:fillRef idx="0">
+              <a:schemeClr val="accent1"/>
+            </a:fillRef>
+            <a:effectRef idx="0">
+              <a:schemeClr val="accent1"/>
+            </a:effectRef>
+            <a:fontRef idx="minor">
+              <a:schemeClr val="tx1"/>
+            </a:fontRef>
+          </p:style>
+          <p:txBody>
+            <a:bodyPr rot="0" spcFirstLastPara="0" vertOverflow="overflow" horzOverflow="overflow" vert="horz" wrap="square" lIns="49664" tIns="24834" rIns="49664" bIns="24834" numCol="1" spcCol="0" rtlCol="0" fromWordArt="0" anchor="ctr" anchorCtr="0" forceAA="0" compatLnSpc="1">
+              <a:prstTxWarp prst="textNoShape">
+                <a:avLst/>
+              </a:prstTxWarp>
+              <a:noAutofit/>
+            </a:bodyPr>
+            <a:lstStyle/>
+            <a:p>
+              <a:pPr algn="ctr"/>
+              <a:endParaRPr lang="zh-TW" altLang="en-US" sz="2000" dirty="0">
+                <a:latin typeface="Times New Roman" panose="02020603050405020304" pitchFamily="18" charset="0"/>
+                <a:cs typeface="Times New Roman" panose="02020603050405020304" pitchFamily="18" charset="0"/>
+              </a:endParaRPr>
+            </a:p>
+          </p:txBody>
+        </p:sp>
+        <p:cxnSp>
+          <p:nvCxnSpPr>
+            <p:cNvPr id="66" name="直線接點 65">
+              <a:extLst>
+                <a:ext uri="{FF2B5EF4-FFF2-40B4-BE49-F238E27FC236}">
+                  <a16:creationId xmlns:a16="http://schemas.microsoft.com/office/drawing/2014/main" id="{8D1112EE-D031-4315-A2F7-13ED9F1ABC40}"/>
+                </a:ext>
+              </a:extLst>
+            </p:cNvPr>
+            <p:cNvCxnSpPr>
+              <a:cxnSpLocks/>
+            </p:cNvCxnSpPr>
+            <p:nvPr/>
+          </p:nvCxnSpPr>
+          <p:spPr>
+            <a:xfrm>
+              <a:off x="6885621" y="1056340"/>
+              <a:ext cx="0" cy="536494"/>
+            </a:xfrm>
+            <a:prstGeom prst="line">
+              <a:avLst/>
+            </a:prstGeom>
+            <a:ln w="38100">
+              <a:solidFill>
+                <a:schemeClr val="tx1"/>
+              </a:solidFill>
+              <a:prstDash val="sysDot"/>
+            </a:ln>
+          </p:spPr>
+          <p:style>
+            <a:lnRef idx="1">
+              <a:schemeClr val="accent1"/>
+            </a:lnRef>
+            <a:fillRef idx="0">
+              <a:schemeClr val="accent1"/>
+            </a:fillRef>
+            <a:effectRef idx="0">
+              <a:schemeClr val="accent1"/>
+            </a:effectRef>
+            <a:fontRef idx="minor">
+              <a:schemeClr val="tx1"/>
+            </a:fontRef>
+          </p:style>
+        </p:cxnSp>
+        <p:sp>
+          <p:nvSpPr>
+            <p:cNvPr id="67" name="橢圓 66">
+              <a:extLst>
+                <a:ext uri="{FF2B5EF4-FFF2-40B4-BE49-F238E27FC236}">
+                  <a16:creationId xmlns:a16="http://schemas.microsoft.com/office/drawing/2014/main" id="{262D2ADA-CBC4-4592-943D-F918D031D1D2}"/>
+                </a:ext>
+              </a:extLst>
+            </p:cNvPr>
+            <p:cNvSpPr/>
+            <p:nvPr/>
+          </p:nvSpPr>
+          <p:spPr>
+            <a:xfrm rot="5400000">
+              <a:off x="6798235" y="1309913"/>
+              <a:ext cx="254044" cy="764737"/>
+            </a:xfrm>
+            <a:prstGeom prst="ellipse">
+              <a:avLst/>
+            </a:prstGeom>
+            <a:ln/>
+          </p:spPr>
+          <p:style>
+            <a:lnRef idx="0">
+              <a:schemeClr val="accent3"/>
+            </a:lnRef>
+            <a:fillRef idx="3">
+              <a:schemeClr val="accent3"/>
+            </a:fillRef>
+            <a:effectRef idx="3">
+              <a:schemeClr val="accent3"/>
+            </a:effectRef>
+            <a:fontRef idx="minor">
+              <a:schemeClr val="lt1"/>
+            </a:fontRef>
+          </p:style>
+          <p:txBody>
+            <a:bodyPr rot="0" spcFirstLastPara="0" vertOverflow="overflow" horzOverflow="overflow" vert="horz" wrap="square" lIns="71907" tIns="35956" rIns="71907" bIns="35956" numCol="1" spcCol="0" rtlCol="0" fromWordArt="0" anchor="ctr" anchorCtr="0" forceAA="0" compatLnSpc="1">
+              <a:prstTxWarp prst="textNoShape">
+                <a:avLst/>
+              </a:prstTxWarp>
+              <a:noAutofit/>
+            </a:bodyPr>
+            <a:lstStyle/>
+            <a:p>
+              <a:pPr algn="ctr"/>
+              <a:endParaRPr lang="zh-TW" altLang="en-US" sz="2000" dirty="0">
+                <a:latin typeface="Times New Roman" panose="02020603050405020304" pitchFamily="18" charset="0"/>
+                <a:cs typeface="Times New Roman" panose="02020603050405020304" pitchFamily="18" charset="0"/>
+              </a:endParaRPr>
+            </a:p>
+          </p:txBody>
+        </p:sp>
+        <p:sp>
+          <p:nvSpPr>
+            <p:cNvPr id="69" name="橢圓 68">
+              <a:extLst>
+                <a:ext uri="{FF2B5EF4-FFF2-40B4-BE49-F238E27FC236}">
+                  <a16:creationId xmlns:a16="http://schemas.microsoft.com/office/drawing/2014/main" id="{9D3C88D2-38A1-4C50-8494-25A04137432B}"/>
+                </a:ext>
+              </a:extLst>
+            </p:cNvPr>
+            <p:cNvSpPr/>
+            <p:nvPr/>
+          </p:nvSpPr>
+          <p:spPr>
+            <a:xfrm>
+              <a:off x="7032612" y="1603626"/>
+              <a:ext cx="179337" cy="179336"/>
+            </a:xfrm>
+            <a:prstGeom prst="ellipse">
+              <a:avLst/>
+            </a:prstGeom>
+            <a:solidFill>
+              <a:schemeClr val="bg1"/>
+            </a:solidFill>
+            <a:ln>
+              <a:solidFill>
+                <a:schemeClr val="tx1"/>
+              </a:solidFill>
+            </a:ln>
+          </p:spPr>
+          <p:style>
+            <a:lnRef idx="2">
+              <a:schemeClr val="accent1">
+                <a:shade val="50000"/>
+              </a:schemeClr>
+            </a:lnRef>
+            <a:fillRef idx="1">
+              <a:schemeClr val="accent1"/>
+            </a:fillRef>
+            <a:effectRef idx="0">
+              <a:schemeClr val="accent1"/>
+            </a:effectRef>
+            <a:fontRef idx="minor">
+              <a:schemeClr val="lt1"/>
+            </a:fontRef>
+          </p:style>
+          <p:txBody>
+            <a:bodyPr rtlCol="0" anchor="ctr"/>
+            <a:lstStyle/>
+            <a:p>
+              <a:pPr algn="ctr"/>
+              <a:endParaRPr lang="zh-TW" altLang="en-US" sz="2000" dirty="0">
+                <a:latin typeface="Times New Roman" panose="02020603050405020304" pitchFamily="18" charset="0"/>
+                <a:cs typeface="Times New Roman" panose="02020603050405020304" pitchFamily="18" charset="0"/>
+              </a:endParaRPr>
+            </a:p>
+          </p:txBody>
+        </p:sp>
+        <p:sp>
+          <p:nvSpPr>
+            <p:cNvPr id="72" name="橢圓 71">
+              <a:extLst>
+                <a:ext uri="{FF2B5EF4-FFF2-40B4-BE49-F238E27FC236}">
+                  <a16:creationId xmlns:a16="http://schemas.microsoft.com/office/drawing/2014/main" id="{00B4317B-9B5C-46D5-B9E4-C8B9B0D165D3}"/>
+                </a:ext>
+              </a:extLst>
+            </p:cNvPr>
+            <p:cNvSpPr/>
+            <p:nvPr/>
+          </p:nvSpPr>
+          <p:spPr>
+            <a:xfrm>
+              <a:off x="6611620" y="1606704"/>
+              <a:ext cx="179337" cy="179335"/>
+            </a:xfrm>
+            <a:prstGeom prst="ellipse">
+              <a:avLst/>
+            </a:prstGeom>
+            <a:solidFill>
+              <a:schemeClr val="tx1"/>
+            </a:solidFill>
+            <a:ln>
+              <a:solidFill>
+                <a:schemeClr val="tx1"/>
+              </a:solidFill>
+            </a:ln>
+          </p:spPr>
+          <p:style>
+            <a:lnRef idx="2">
+              <a:schemeClr val="accent1">
+                <a:shade val="50000"/>
+              </a:schemeClr>
+            </a:lnRef>
+            <a:fillRef idx="1">
+              <a:schemeClr val="accent1"/>
+            </a:fillRef>
+            <a:effectRef idx="0">
+              <a:schemeClr val="accent1"/>
+            </a:effectRef>
+            <a:fontRef idx="minor">
+              <a:schemeClr val="lt1"/>
+            </a:fontRef>
+          </p:style>
+          <p:txBody>
+            <a:bodyPr rtlCol="0" anchor="ctr"/>
+            <a:lstStyle/>
+            <a:p>
+              <a:pPr algn="ctr"/>
+              <a:endParaRPr lang="zh-TW" altLang="en-US" sz="2000" dirty="0">
+                <a:latin typeface="Times New Roman" panose="02020603050405020304" pitchFamily="18" charset="0"/>
+                <a:cs typeface="Times New Roman" panose="02020603050405020304" pitchFamily="18" charset="0"/>
+              </a:endParaRPr>
+            </a:p>
+          </p:txBody>
+        </p:sp>
+        <p:cxnSp>
+          <p:nvCxnSpPr>
+            <p:cNvPr id="75" name="直線單箭頭接點 74">
+              <a:extLst>
+                <a:ext uri="{FF2B5EF4-FFF2-40B4-BE49-F238E27FC236}">
+                  <a16:creationId xmlns:a16="http://schemas.microsoft.com/office/drawing/2014/main" id="{94119E60-72E6-423B-A3A3-EE731567BB02}"/>
+                </a:ext>
+              </a:extLst>
+            </p:cNvPr>
+            <p:cNvCxnSpPr>
+              <a:cxnSpLocks/>
+            </p:cNvCxnSpPr>
+            <p:nvPr/>
+          </p:nvCxnSpPr>
+          <p:spPr>
+            <a:xfrm>
+              <a:off x="4609726" y="2257429"/>
+              <a:ext cx="5282868" cy="0"/>
+            </a:xfrm>
+            <a:prstGeom prst="straightConnector1">
+              <a:avLst/>
+            </a:prstGeom>
+            <a:ln w="57150">
+              <a:tailEnd type="triangle" w="med" len="lg"/>
+            </a:ln>
+          </p:spPr>
+          <p:style>
+            <a:lnRef idx="3">
+              <a:schemeClr val="dk1"/>
+            </a:lnRef>
+            <a:fillRef idx="0">
+              <a:schemeClr val="dk1"/>
+            </a:fillRef>
+            <a:effectRef idx="2">
+              <a:schemeClr val="dk1"/>
+            </a:effectRef>
+            <a:fontRef idx="minor">
+              <a:schemeClr val="tx1"/>
+            </a:fontRef>
+          </p:style>
+        </p:cxnSp>
+        <mc:AlternateContent xmlns:mc="http://schemas.openxmlformats.org/markup-compatibility/2006" xmlns:a14="http://schemas.microsoft.com/office/drawing/2010/main">
+          <mc:Choice Requires="a14">
+            <p:sp>
+              <p:nvSpPr>
+                <p:cNvPr id="76" name="矩形 75">
+                  <a:extLst>
+                    <a:ext uri="{FF2B5EF4-FFF2-40B4-BE49-F238E27FC236}">
+                      <a16:creationId xmlns:a16="http://schemas.microsoft.com/office/drawing/2014/main" id="{3C2D1F2C-BAE1-4767-A081-D437CDD85564}"/>
+                    </a:ext>
+                  </a:extLst>
+                </p:cNvPr>
+                <p:cNvSpPr/>
+                <p:nvPr/>
+              </p:nvSpPr>
+              <p:spPr>
+                <a:xfrm>
+                  <a:off x="6269794" y="2263957"/>
+                  <a:ext cx="1574925" cy="400110"/>
+                </a:xfrm>
+                <a:prstGeom prst="rect">
+                  <a:avLst/>
+                </a:prstGeom>
+              </p:spPr>
+              <p:txBody>
+                <a:bodyPr wrap="square">
+                  <a:spAutoFit/>
+                </a:bodyPr>
+                <a:lstStyle/>
+                <a:p>
+                  <a:pPr/>
+                  <a14:m>
+                    <m:oMathPara xmlns:m="http://schemas.openxmlformats.org/officeDocument/2006/math">
+                      <m:oMathParaPr>
+                        <m:jc m:val="centerGroup"/>
+                      </m:oMathParaPr>
+                      <m:oMath xmlns:m="http://schemas.openxmlformats.org/officeDocument/2006/math">
+                        <m:r>
+                          <a:rPr lang="en-US" altLang="zh-TW" sz="2000" b="1" i="1">
+                            <a:latin typeface="Cambria Math" panose="02040503050406030204" pitchFamily="18" charset="0"/>
+                            <a:cs typeface="Times New Roman" panose="02020603050405020304" pitchFamily="18" charset="0"/>
+                          </a:rPr>
+                          <m:t>𝑸</m:t>
+                        </m:r>
+                        <m:r>
+                          <a:rPr lang="en-US" altLang="zh-TW" sz="2000" b="1" i="1">
+                            <a:latin typeface="Cambria Math" panose="02040503050406030204" pitchFamily="18" charset="0"/>
+                            <a:cs typeface="Times New Roman" panose="02020603050405020304" pitchFamily="18" charset="0"/>
+                          </a:rPr>
+                          <m:t>=</m:t>
+                        </m:r>
+                        <m:sSub>
+                          <m:sSubPr>
+                            <m:ctrlPr>
+                              <a:rPr lang="en-US" altLang="zh-TW" sz="2000" b="1" i="1" dirty="0">
+                                <a:latin typeface="Cambria Math" panose="02040503050406030204" pitchFamily="18" charset="0"/>
+                                <a:cs typeface="Times New Roman" panose="02020603050405020304" pitchFamily="18" charset="0"/>
+                              </a:rPr>
+                            </m:ctrlPr>
+                          </m:sSubPr>
+                          <m:e>
+                            <m:r>
+                              <a:rPr lang="en-US" altLang="zh-TW" sz="2000" b="1" i="1" dirty="0">
+                                <a:latin typeface="Cambria Math" panose="02040503050406030204" pitchFamily="18" charset="0"/>
+                                <a:cs typeface="Times New Roman" panose="02020603050405020304" pitchFamily="18" charset="0"/>
+                              </a:rPr>
+                              <m:t>𝑸</m:t>
+                            </m:r>
+                          </m:e>
+                          <m:sub>
+                            <m:r>
+                              <a:rPr lang="en-US" altLang="zh-TW" sz="2000" b="1" i="1" dirty="0">
+                                <a:latin typeface="Cambria Math" panose="02040503050406030204" pitchFamily="18" charset="0"/>
+                                <a:cs typeface="Times New Roman" panose="02020603050405020304" pitchFamily="18" charset="0"/>
+                              </a:rPr>
+                              <m:t>𝑪</m:t>
+                            </m:r>
+                          </m:sub>
+                        </m:sSub>
+                        <m:r>
+                          <a:rPr lang="zh-TW" altLang="en-US" sz="2000" b="1" i="1" dirty="0">
+                            <a:latin typeface="Cambria Math" panose="02040503050406030204" pitchFamily="18" charset="0"/>
+                            <a:cs typeface="Times New Roman" panose="02020603050405020304" pitchFamily="18" charset="0"/>
+                          </a:rPr>
+                          <m:t> </m:t>
+                        </m:r>
+                        <m:r>
+                          <m:rPr>
+                            <m:sty m:val="p"/>
+                          </m:rPr>
+                          <a:rPr lang="en-US" altLang="zh-TW" sz="2000" i="1" dirty="0">
+                            <a:latin typeface="Cambria Math" panose="02040503050406030204" pitchFamily="18" charset="0"/>
+                            <a:cs typeface="Times New Roman" panose="02020603050405020304" pitchFamily="18" charset="0"/>
+                          </a:rPr>
+                          <m:t>sin</m:t>
+                        </m:r>
+                        <m:r>
+                          <a:rPr lang="en-US" altLang="zh-TW" sz="2000" i="1" dirty="0">
+                            <a:latin typeface="Cambria Math" panose="02040503050406030204" pitchFamily="18" charset="0"/>
+                            <a:cs typeface="Times New Roman" panose="02020603050405020304" pitchFamily="18" charset="0"/>
+                          </a:rPr>
+                          <m:t>𝜃</m:t>
+                        </m:r>
+                      </m:oMath>
+                    </m:oMathPara>
+                  </a14:m>
+                  <a:endParaRPr lang="zh-TW" altLang="en-US" sz="2000" dirty="0">
+                    <a:latin typeface="Times New Roman" panose="02020603050405020304" pitchFamily="18" charset="0"/>
+                    <a:cs typeface="Times New Roman" panose="02020603050405020304" pitchFamily="18" charset="0"/>
+                  </a:endParaRPr>
+                </a:p>
+              </p:txBody>
+            </p:sp>
+          </mc:Choice>
+          <mc:Fallback xmlns="">
+            <p:sp>
+              <p:nvSpPr>
+                <p:cNvPr id="76" name="矩形 75">
+                  <a:extLst>
+                    <a:ext uri="{FF2B5EF4-FFF2-40B4-BE49-F238E27FC236}">
+                      <a16:creationId xmlns:a16="http://schemas.microsoft.com/office/drawing/2014/main" id="{3C2D1F2C-BAE1-4767-A081-D437CDD85564}"/>
+                    </a:ext>
+                  </a:extLst>
+                </p:cNvPr>
+                <p:cNvSpPr>
+                  <a:spLocks noRot="1" noChangeAspect="1" noMove="1" noResize="1" noEditPoints="1" noAdjustHandles="1" noChangeArrowheads="1" noChangeShapeType="1" noTextEdit="1"/>
+                </p:cNvSpPr>
+                <p:nvPr/>
+              </p:nvSpPr>
+              <p:spPr>
+                <a:xfrm>
+                  <a:off x="6269794" y="2263957"/>
+                  <a:ext cx="1574925" cy="400110"/>
+                </a:xfrm>
+                <a:prstGeom prst="rect">
+                  <a:avLst/>
+                </a:prstGeom>
+                <a:blipFill>
+                  <a:blip r:embed="rId18"/>
+                  <a:stretch>
+                    <a:fillRect l="-388" b="-13846"/>
+                  </a:stretch>
+                </a:blipFill>
+              </p:spPr>
+              <p:txBody>
+                <a:bodyPr/>
+                <a:lstStyle/>
+                <a:p>
+                  <a:r>
+                    <a:rPr lang="zh-TW" altLang="en-US">
+                      <a:noFill/>
+                    </a:rPr>
+                    <a:t> </a:t>
+                  </a:r>
+                </a:p>
+              </p:txBody>
+            </p:sp>
+          </mc:Fallback>
+        </mc:AlternateContent>
+        <p:grpSp>
+          <p:nvGrpSpPr>
+            <p:cNvPr id="77" name="群組 76">
+              <a:extLst>
+                <a:ext uri="{FF2B5EF4-FFF2-40B4-BE49-F238E27FC236}">
+                  <a16:creationId xmlns:a16="http://schemas.microsoft.com/office/drawing/2014/main" id="{11CF7B7F-3AEF-4577-928A-70C2C60571BC}"/>
+                </a:ext>
+              </a:extLst>
+            </p:cNvPr>
+            <p:cNvGrpSpPr/>
+            <p:nvPr/>
+          </p:nvGrpSpPr>
+          <p:grpSpPr>
+            <a:xfrm>
+              <a:off x="7591520" y="1504001"/>
+              <a:ext cx="1270949" cy="380213"/>
+              <a:chOff x="6016985" y="7397030"/>
+              <a:chExt cx="2340007" cy="700028"/>
+            </a:xfrm>
+          </p:grpSpPr>
+          <p:pic>
+            <p:nvPicPr>
+              <p:cNvPr id="78" name="圖片 77">
+                <a:extLst>
+                  <a:ext uri="{FF2B5EF4-FFF2-40B4-BE49-F238E27FC236}">
+                    <a16:creationId xmlns:a16="http://schemas.microsoft.com/office/drawing/2014/main" id="{04F71EEE-D6F0-4B59-8082-917407FF5C87}"/>
+                  </a:ext>
+                </a:extLst>
+              </p:cNvPr>
+              <p:cNvPicPr>
+                <a:picLocks noChangeAspect="1"/>
+              </p:cNvPicPr>
+              <p:nvPr/>
+            </p:nvPicPr>
+            <p:blipFill rotWithShape="1">
+              <a:blip r:embed="rId17">
+                <a:duotone>
+                  <a:schemeClr val="accent4">
+                    <a:shade val="45000"/>
+                    <a:satMod val="135000"/>
+                  </a:schemeClr>
+                  <a:prstClr val="white"/>
+                </a:duotone>
+              </a:blip>
+              <a:srcRect l="12724" r="56552"/>
+              <a:stretch/>
+            </p:blipFill>
+            <p:spPr>
+              <a:xfrm>
+                <a:off x="6496739" y="7397030"/>
+                <a:ext cx="487370" cy="700027"/>
+              </a:xfrm>
+              <a:prstGeom prst="rect">
+                <a:avLst/>
+              </a:prstGeom>
+            </p:spPr>
+          </p:pic>
+          <p:pic>
+            <p:nvPicPr>
+              <p:cNvPr id="79" name="圖片 78">
+                <a:extLst>
+                  <a:ext uri="{FF2B5EF4-FFF2-40B4-BE49-F238E27FC236}">
+                    <a16:creationId xmlns:a16="http://schemas.microsoft.com/office/drawing/2014/main" id="{D98250F2-70F5-4D18-B3A2-D8814D7DF0FE}"/>
+                  </a:ext>
+                </a:extLst>
+              </p:cNvPr>
+              <p:cNvPicPr>
+                <a:picLocks noChangeAspect="1"/>
+              </p:cNvPicPr>
+              <p:nvPr/>
+            </p:nvPicPr>
+            <p:blipFill rotWithShape="1">
+              <a:blip r:embed="rId17">
+                <a:duotone>
+                  <a:schemeClr val="accent4">
+                    <a:shade val="45000"/>
+                    <a:satMod val="135000"/>
+                  </a:schemeClr>
+                  <a:prstClr val="white"/>
+                </a:duotone>
+              </a:blip>
+              <a:srcRect l="12870"/>
+              <a:stretch/>
+            </p:blipFill>
+            <p:spPr>
+              <a:xfrm>
+                <a:off x="6974826" y="7397031"/>
+                <a:ext cx="1382166" cy="700027"/>
+              </a:xfrm>
+              <a:prstGeom prst="rect">
+                <a:avLst/>
+              </a:prstGeom>
+            </p:spPr>
+          </p:pic>
+          <p:pic>
+            <p:nvPicPr>
+              <p:cNvPr id="80" name="圖片 79">
+                <a:extLst>
+                  <a:ext uri="{FF2B5EF4-FFF2-40B4-BE49-F238E27FC236}">
+                    <a16:creationId xmlns:a16="http://schemas.microsoft.com/office/drawing/2014/main" id="{D6E3DEFE-7336-43F5-A99D-6953EA7E7360}"/>
+                  </a:ext>
+                </a:extLst>
+              </p:cNvPr>
+              <p:cNvPicPr>
+                <a:picLocks noChangeAspect="1"/>
+              </p:cNvPicPr>
+              <p:nvPr/>
+            </p:nvPicPr>
+            <p:blipFill rotWithShape="1">
+              <a:blip r:embed="rId17">
+                <a:duotone>
+                  <a:schemeClr val="accent4">
+                    <a:shade val="45000"/>
+                    <a:satMod val="135000"/>
+                  </a:schemeClr>
+                  <a:prstClr val="white"/>
+                </a:duotone>
+              </a:blip>
+              <a:srcRect l="12724" r="56552"/>
+              <a:stretch/>
+            </p:blipFill>
+            <p:spPr>
+              <a:xfrm>
+                <a:off x="6016985" y="7397030"/>
+                <a:ext cx="487370" cy="700027"/>
+              </a:xfrm>
+              <a:prstGeom prst="rect">
+                <a:avLst/>
+              </a:prstGeom>
+            </p:spPr>
+          </p:pic>
+        </p:grpSp>
+        <p:grpSp>
+          <p:nvGrpSpPr>
+            <p:cNvPr id="81" name="群組 80">
+              <a:extLst>
+                <a:ext uri="{FF2B5EF4-FFF2-40B4-BE49-F238E27FC236}">
+                  <a16:creationId xmlns:a16="http://schemas.microsoft.com/office/drawing/2014/main" id="{07E4BADB-D64E-49E8-8869-A242A3F775C2}"/>
+                </a:ext>
+              </a:extLst>
+            </p:cNvPr>
+            <p:cNvGrpSpPr/>
+            <p:nvPr/>
+          </p:nvGrpSpPr>
+          <p:grpSpPr>
+            <a:xfrm rot="1808853">
+              <a:off x="5768374" y="1090050"/>
+              <a:ext cx="1270949" cy="380213"/>
+              <a:chOff x="6016985" y="7397030"/>
+              <a:chExt cx="2340007" cy="700028"/>
+            </a:xfrm>
+          </p:grpSpPr>
+          <p:pic>
+            <p:nvPicPr>
+              <p:cNvPr id="82" name="圖片 81">
+                <a:extLst>
+                  <a:ext uri="{FF2B5EF4-FFF2-40B4-BE49-F238E27FC236}">
+                    <a16:creationId xmlns:a16="http://schemas.microsoft.com/office/drawing/2014/main" id="{8B7A6694-5CF6-492C-B3C6-8CA9724A864B}"/>
+                  </a:ext>
+                </a:extLst>
+              </p:cNvPr>
+              <p:cNvPicPr>
+                <a:picLocks noChangeAspect="1"/>
+              </p:cNvPicPr>
+              <p:nvPr/>
+            </p:nvPicPr>
+            <p:blipFill rotWithShape="1">
+              <a:blip r:embed="rId17">
+                <a:duotone>
+                  <a:schemeClr val="accent4">
+                    <a:shade val="45000"/>
+                    <a:satMod val="135000"/>
+                  </a:schemeClr>
+                  <a:prstClr val="white"/>
+                </a:duotone>
+              </a:blip>
+              <a:srcRect l="12724" r="56552"/>
+              <a:stretch/>
+            </p:blipFill>
+            <p:spPr>
+              <a:xfrm>
+                <a:off x="6496739" y="7397030"/>
+                <a:ext cx="487370" cy="700027"/>
+              </a:xfrm>
+              <a:prstGeom prst="rect">
+                <a:avLst/>
+              </a:prstGeom>
+            </p:spPr>
+          </p:pic>
+          <p:pic>
+            <p:nvPicPr>
+              <p:cNvPr id="83" name="圖片 82">
+                <a:extLst>
+                  <a:ext uri="{FF2B5EF4-FFF2-40B4-BE49-F238E27FC236}">
+                    <a16:creationId xmlns:a16="http://schemas.microsoft.com/office/drawing/2014/main" id="{D4E5473F-9D01-41F2-AE28-5032D7181FCE}"/>
+                  </a:ext>
+                </a:extLst>
+              </p:cNvPr>
+              <p:cNvPicPr>
+                <a:picLocks noChangeAspect="1"/>
+              </p:cNvPicPr>
+              <p:nvPr/>
+            </p:nvPicPr>
+            <p:blipFill rotWithShape="1">
+              <a:blip r:embed="rId17">
+                <a:duotone>
+                  <a:schemeClr val="accent4">
+                    <a:shade val="45000"/>
+                    <a:satMod val="135000"/>
+                  </a:schemeClr>
+                  <a:prstClr val="white"/>
+                </a:duotone>
+              </a:blip>
+              <a:srcRect l="12870"/>
+              <a:stretch/>
+            </p:blipFill>
+            <p:spPr>
+              <a:xfrm>
+                <a:off x="6974826" y="7397031"/>
+                <a:ext cx="1382166" cy="700027"/>
+              </a:xfrm>
+              <a:prstGeom prst="rect">
+                <a:avLst/>
+              </a:prstGeom>
+            </p:spPr>
+          </p:pic>
+          <p:pic>
+            <p:nvPicPr>
+              <p:cNvPr id="84" name="圖片 83">
+                <a:extLst>
+                  <a:ext uri="{FF2B5EF4-FFF2-40B4-BE49-F238E27FC236}">
+                    <a16:creationId xmlns:a16="http://schemas.microsoft.com/office/drawing/2014/main" id="{7894B8AE-EB46-4BB9-B9FB-08D8AA57265F}"/>
+                  </a:ext>
+                </a:extLst>
+              </p:cNvPr>
+              <p:cNvPicPr>
+                <a:picLocks noChangeAspect="1"/>
+              </p:cNvPicPr>
+              <p:nvPr/>
+            </p:nvPicPr>
+            <p:blipFill rotWithShape="1">
+              <a:blip r:embed="rId17">
+                <a:duotone>
+                  <a:schemeClr val="accent4">
+                    <a:shade val="45000"/>
+                    <a:satMod val="135000"/>
+                  </a:schemeClr>
+                  <a:prstClr val="white"/>
+                </a:duotone>
+              </a:blip>
+              <a:srcRect l="12724" r="56552"/>
+              <a:stretch/>
+            </p:blipFill>
+            <p:spPr>
+              <a:xfrm>
+                <a:off x="6016985" y="7397030"/>
+                <a:ext cx="487370" cy="700027"/>
+              </a:xfrm>
+              <a:prstGeom prst="rect">
+                <a:avLst/>
+              </a:prstGeom>
+            </p:spPr>
+          </p:pic>
+        </p:grpSp>
+        <p:grpSp>
+          <p:nvGrpSpPr>
+            <p:cNvPr id="86" name="群組 85">
+              <a:extLst>
+                <a:ext uri="{FF2B5EF4-FFF2-40B4-BE49-F238E27FC236}">
+                  <a16:creationId xmlns:a16="http://schemas.microsoft.com/office/drawing/2014/main" id="{E7E1964D-1E46-4415-9987-7EB45D77E931}"/>
+                </a:ext>
+              </a:extLst>
+            </p:cNvPr>
+            <p:cNvGrpSpPr/>
+            <p:nvPr/>
+          </p:nvGrpSpPr>
+          <p:grpSpPr>
+            <a:xfrm rot="5400000">
+              <a:off x="4305496" y="709538"/>
+              <a:ext cx="1270949" cy="380213"/>
+              <a:chOff x="6016985" y="7397030"/>
+              <a:chExt cx="2340007" cy="700028"/>
+            </a:xfrm>
+          </p:grpSpPr>
+          <p:pic>
+            <p:nvPicPr>
+              <p:cNvPr id="87" name="圖片 86">
+                <a:extLst>
+                  <a:ext uri="{FF2B5EF4-FFF2-40B4-BE49-F238E27FC236}">
+                    <a16:creationId xmlns:a16="http://schemas.microsoft.com/office/drawing/2014/main" id="{7BF4D475-C674-48CF-B3AC-D6E36D5E6AD6}"/>
+                  </a:ext>
+                </a:extLst>
+              </p:cNvPr>
+              <p:cNvPicPr>
+                <a:picLocks noChangeAspect="1"/>
+              </p:cNvPicPr>
+              <p:nvPr/>
+            </p:nvPicPr>
+            <p:blipFill rotWithShape="1">
+              <a:blip r:embed="rId17">
+                <a:duotone>
+                  <a:schemeClr val="accent4">
+                    <a:shade val="45000"/>
+                    <a:satMod val="135000"/>
+                  </a:schemeClr>
+                  <a:prstClr val="white"/>
+                </a:duotone>
+              </a:blip>
+              <a:srcRect l="12724" r="56552"/>
+              <a:stretch/>
+            </p:blipFill>
+            <p:spPr>
+              <a:xfrm>
+                <a:off x="6496739" y="7397030"/>
+                <a:ext cx="487370" cy="700027"/>
+              </a:xfrm>
+              <a:prstGeom prst="rect">
+                <a:avLst/>
+              </a:prstGeom>
+            </p:spPr>
+          </p:pic>
+          <p:pic>
+            <p:nvPicPr>
+              <p:cNvPr id="88" name="圖片 87">
+                <a:extLst>
+                  <a:ext uri="{FF2B5EF4-FFF2-40B4-BE49-F238E27FC236}">
+                    <a16:creationId xmlns:a16="http://schemas.microsoft.com/office/drawing/2014/main" id="{734C474B-9C66-4A2D-B0C0-03E7B6F919A6}"/>
+                  </a:ext>
+                </a:extLst>
+              </p:cNvPr>
+              <p:cNvPicPr>
+                <a:picLocks noChangeAspect="1"/>
+              </p:cNvPicPr>
+              <p:nvPr/>
+            </p:nvPicPr>
+            <p:blipFill rotWithShape="1">
+              <a:blip r:embed="rId17">
+                <a:duotone>
+                  <a:schemeClr val="accent4">
+                    <a:shade val="45000"/>
+                    <a:satMod val="135000"/>
+                  </a:schemeClr>
+                  <a:prstClr val="white"/>
+                </a:duotone>
+              </a:blip>
+              <a:srcRect l="12870"/>
+              <a:stretch/>
+            </p:blipFill>
+            <p:spPr>
+              <a:xfrm>
+                <a:off x="6974826" y="7397031"/>
+                <a:ext cx="1382166" cy="700027"/>
+              </a:xfrm>
+              <a:prstGeom prst="rect">
+                <a:avLst/>
+              </a:prstGeom>
+            </p:spPr>
+          </p:pic>
+          <p:pic>
+            <p:nvPicPr>
+              <p:cNvPr id="89" name="圖片 88">
+                <a:extLst>
+                  <a:ext uri="{FF2B5EF4-FFF2-40B4-BE49-F238E27FC236}">
+                    <a16:creationId xmlns:a16="http://schemas.microsoft.com/office/drawing/2014/main" id="{C4CED2E0-294F-4A13-A695-F40EEFC639CC}"/>
+                  </a:ext>
+                </a:extLst>
+              </p:cNvPr>
+              <p:cNvPicPr>
+                <a:picLocks noChangeAspect="1"/>
+              </p:cNvPicPr>
+              <p:nvPr/>
+            </p:nvPicPr>
+            <p:blipFill rotWithShape="1">
+              <a:blip r:embed="rId17">
+                <a:duotone>
+                  <a:schemeClr val="accent4">
+                    <a:shade val="45000"/>
+                    <a:satMod val="135000"/>
+                  </a:schemeClr>
+                  <a:prstClr val="white"/>
+                </a:duotone>
+              </a:blip>
+              <a:srcRect l="12724" r="56552"/>
+              <a:stretch/>
+            </p:blipFill>
+            <p:spPr>
+              <a:xfrm>
+                <a:off x="6016985" y="7397030"/>
+                <a:ext cx="487370" cy="700027"/>
+              </a:xfrm>
+              <a:prstGeom prst="rect">
+                <a:avLst/>
+              </a:prstGeom>
+            </p:spPr>
+          </p:pic>
+        </p:grpSp>
+        <mc:AlternateContent xmlns:mc="http://schemas.openxmlformats.org/markup-compatibility/2006" xmlns:a14="http://schemas.microsoft.com/office/drawing/2010/main">
+          <mc:Choice Requires="a14">
+            <p:sp>
+              <p:nvSpPr>
+                <p:cNvPr id="94" name="文字方塊 93">
+                  <a:extLst>
+                    <a:ext uri="{FF2B5EF4-FFF2-40B4-BE49-F238E27FC236}">
+                      <a16:creationId xmlns:a16="http://schemas.microsoft.com/office/drawing/2014/main" id="{2D7FD59A-AF03-4237-A7EC-2ACF33CF17D6}"/>
+                    </a:ext>
+                  </a:extLst>
+                </p:cNvPr>
+                <p:cNvSpPr txBox="1"/>
+                <p:nvPr/>
+              </p:nvSpPr>
+              <p:spPr>
+                <a:xfrm>
+                  <a:off x="1153601" y="1436821"/>
+                  <a:ext cx="537730" cy="400110"/>
+                </a:xfrm>
+                <a:prstGeom prst="rect">
+                  <a:avLst/>
+                </a:prstGeom>
+                <a:noFill/>
+              </p:spPr>
+              <p:txBody>
+                <a:bodyPr wrap="square" rtlCol="0">
+                  <a:spAutoFit/>
+                </a:bodyPr>
+                <a:lstStyle/>
+                <a:p>
+                  <a:pPr algn="ctr"/>
+                  <a14:m>
+                    <m:oMath xmlns:m="http://schemas.openxmlformats.org/officeDocument/2006/math">
+                      <m:sSub>
+                        <m:sSubPr>
+                          <m:ctrlPr>
+                            <a:rPr lang="en-US" altLang="zh-TW" sz="2000" b="1" i="1" dirty="0">
+                              <a:latin typeface="Cambria Math" panose="02040503050406030204" pitchFamily="18" charset="0"/>
+                              <a:cs typeface="Times New Roman" panose="02020603050405020304" pitchFamily="18" charset="0"/>
+                            </a:rPr>
+                          </m:ctrlPr>
+                        </m:sSubPr>
+                        <m:e>
+                          <m:r>
+                            <a:rPr lang="en-US" altLang="zh-TW" sz="2000" b="1" i="1" dirty="0">
+                              <a:latin typeface="Cambria Math" panose="02040503050406030204" pitchFamily="18" charset="0"/>
+                              <a:cs typeface="Times New Roman" panose="02020603050405020304" pitchFamily="18" charset="0"/>
+                            </a:rPr>
+                            <m:t>𝑸</m:t>
+                          </m:r>
+                        </m:e>
+                        <m:sub>
+                          <m:r>
+                            <a:rPr lang="en-US" altLang="zh-TW" sz="2000" b="1" i="1" dirty="0">
+                              <a:latin typeface="Cambria Math" panose="02040503050406030204" pitchFamily="18" charset="0"/>
+                              <a:cs typeface="Times New Roman" panose="02020603050405020304" pitchFamily="18" charset="0"/>
+                            </a:rPr>
+                            <m:t>𝑪</m:t>
+                          </m:r>
+                        </m:sub>
+                      </m:sSub>
+                    </m:oMath>
+                  </a14:m>
+                  <a:r>
+                    <a:rPr lang="en-US" altLang="zh-TW" sz="2000" dirty="0">
+                      <a:latin typeface="Times New Roman" panose="02020603050405020304" pitchFamily="18" charset="0"/>
+                      <a:cs typeface="Times New Roman" panose="02020603050405020304" pitchFamily="18" charset="0"/>
+                    </a:rPr>
+                    <a:t> </a:t>
+                  </a:r>
+                  <a:endParaRPr lang="zh-TW" altLang="en-US" sz="2000" b="1" dirty="0">
+                    <a:latin typeface="Times New Roman" panose="02020603050405020304" pitchFamily="18" charset="0"/>
+                    <a:cs typeface="Times New Roman" panose="02020603050405020304" pitchFamily="18" charset="0"/>
+                  </a:endParaRPr>
+                </a:p>
+              </p:txBody>
+            </p:sp>
+          </mc:Choice>
+          <mc:Fallback xmlns="">
+            <p:sp>
+              <p:nvSpPr>
+                <p:cNvPr id="94" name="文字方塊 93">
+                  <a:extLst>
+                    <a:ext uri="{FF2B5EF4-FFF2-40B4-BE49-F238E27FC236}">
+                      <a16:creationId xmlns:a16="http://schemas.microsoft.com/office/drawing/2014/main" id="{2D7FD59A-AF03-4237-A7EC-2ACF33CF17D6}"/>
+                    </a:ext>
+                  </a:extLst>
+                </p:cNvPr>
+                <p:cNvSpPr txBox="1">
+                  <a:spLocks noRot="1" noChangeAspect="1" noMove="1" noResize="1" noEditPoints="1" noAdjustHandles="1" noChangeArrowheads="1" noChangeShapeType="1" noTextEdit="1"/>
+                </p:cNvSpPr>
+                <p:nvPr/>
+              </p:nvSpPr>
+              <p:spPr>
+                <a:xfrm>
+                  <a:off x="1153601" y="1436821"/>
+                  <a:ext cx="537730" cy="400110"/>
+                </a:xfrm>
+                <a:prstGeom prst="rect">
+                  <a:avLst/>
+                </a:prstGeom>
+                <a:blipFill>
+                  <a:blip r:embed="rId19"/>
+                  <a:stretch>
+                    <a:fillRect b="-12121"/>
+                  </a:stretch>
+                </a:blipFill>
+              </p:spPr>
+              <p:txBody>
+                <a:bodyPr/>
+                <a:lstStyle/>
+                <a:p>
+                  <a:r>
+                    <a:rPr lang="zh-TW" altLang="en-US">
+                      <a:noFill/>
+                    </a:rPr>
+                    <a:t> </a:t>
+                  </a:r>
+                </a:p>
+              </p:txBody>
+            </p:sp>
+          </mc:Fallback>
+        </mc:AlternateContent>
+      </p:grpSp>
+    </p:spTree>
+    <p:extLst>
+      <p:ext uri="{BB962C8B-B14F-4D97-AF65-F5344CB8AC3E}">
+        <p14:creationId xmlns:p14="http://schemas.microsoft.com/office/powerpoint/2010/main" val="3327083831"/>
+      </p:ext>
+    </p:extLst>
+  </p:cSld>
+  <p:clrMapOvr>
+    <a:masterClrMapping/>
+  </p:clrMapOvr>
+</p:sld>
+</file>
+
 <file path=ppt/theme/theme1.xml><?xml version="1.0" encoding="utf-8"?>
 <a:theme xmlns:a="http://schemas.openxmlformats.org/drawingml/2006/main" name="Office 佈景主題">
   <a:themeElements>
